--- a/Capstone_UE_DAB_2025/Capstone_UE_DAB_2025Final/Sayavong_Kevin_Capstone_Presentation_Final.pptx
+++ b/Capstone_UE_DAB_2025/Capstone_UE_DAB_2025Final/Sayavong_Kevin_Capstone_Presentation_Final.pptx
@@ -116,11 +116,6 @@
       </a:defRPr>
     </a:lvl9pPr>
   </p:defaultTextStyle>
-  <p:extLst>
-    <p:ext uri="{EFAFB233-063F-42B5-8137-9DF3F51BA10A}">
-      <p15:sldGuideLst xmlns:p15="http://schemas.microsoft.com/office/powerpoint/2012/main"/>
-    </p:ext>
-  </p:extLst>
 </p:presentation>
 </file>
 
@@ -128,6 +123,7 @@
 <p1510:revInfo xmlns:a="http://schemas.openxmlformats.org/drawingml/2006/main" xmlns:r="http://schemas.openxmlformats.org/officeDocument/2006/relationships" xmlns:p1510="http://schemas.microsoft.com/office/powerpoint/2015/10/main">
   <p1510:revLst>
     <p1510:client id="{74C1BB44-83B2-EDDC-2326-513387BD9550}" v="106" dt="2026-03-19T19:07:12.579"/>
+    <p1510:client id="{C76F153D-BF9A-505D-8A52-00D6317369BC}" v="3" dt="2026-03-19T21:50:50.735"/>
   </p1510:revLst>
 </p1510:revInfo>
 </file>
@@ -523,7 +519,7 @@
           <a:bodyPr/>
           <a:lstStyle/>
           <a:p>
-            <a:endParaRPr lang="en-US" dirty="0"/>
+            <a:endParaRPr lang="en-US"/>
           </a:p>
         </p:txBody>
       </p:sp>
@@ -607,7 +603,7 @@
           <a:bodyPr/>
           <a:lstStyle/>
           <a:p>
-            <a:endParaRPr lang="en-US" dirty="0"/>
+            <a:endParaRPr lang="en-US"/>
           </a:p>
         </p:txBody>
       </p:sp>
@@ -691,7 +687,7 @@
           <a:bodyPr/>
           <a:lstStyle/>
           <a:p>
-            <a:endParaRPr lang="en-US" dirty="0"/>
+            <a:endParaRPr lang="en-US"/>
           </a:p>
         </p:txBody>
       </p:sp>
@@ -775,7 +771,7 @@
           <a:bodyPr/>
           <a:lstStyle/>
           <a:p>
-            <a:endParaRPr lang="en-US" dirty="0"/>
+            <a:endParaRPr lang="en-US"/>
           </a:p>
         </p:txBody>
       </p:sp>
@@ -859,7 +855,7 @@
           <a:bodyPr/>
           <a:lstStyle/>
           <a:p>
-            <a:endParaRPr lang="en-US" dirty="0"/>
+            <a:endParaRPr lang="en-US"/>
           </a:p>
         </p:txBody>
       </p:sp>
@@ -943,7 +939,7 @@
           <a:bodyPr/>
           <a:lstStyle/>
           <a:p>
-            <a:endParaRPr lang="en-US" dirty="0"/>
+            <a:endParaRPr lang="en-US"/>
           </a:p>
         </p:txBody>
       </p:sp>
@@ -1027,7 +1023,7 @@
           <a:bodyPr/>
           <a:lstStyle/>
           <a:p>
-            <a:endParaRPr lang="en-US" dirty="0"/>
+            <a:endParaRPr lang="en-US"/>
           </a:p>
         </p:txBody>
       </p:sp>
@@ -1111,7 +1107,7 @@
           <a:bodyPr/>
           <a:lstStyle/>
           <a:p>
-            <a:endParaRPr lang="en-US" dirty="0"/>
+            <a:endParaRPr lang="en-US"/>
           </a:p>
         </p:txBody>
       </p:sp>
@@ -1195,7 +1191,7 @@
           <a:bodyPr/>
           <a:lstStyle/>
           <a:p>
-            <a:endParaRPr lang="en-US" dirty="0"/>
+            <a:endParaRPr lang="en-US"/>
           </a:p>
         </p:txBody>
       </p:sp>
@@ -1279,7 +1275,7 @@
           <a:bodyPr/>
           <a:lstStyle/>
           <a:p>
-            <a:endParaRPr lang="en-US" dirty="0"/>
+            <a:endParaRPr lang="en-US"/>
           </a:p>
         </p:txBody>
       </p:sp>
@@ -1363,7 +1359,7 @@
           <a:bodyPr/>
           <a:lstStyle/>
           <a:p>
-            <a:endParaRPr lang="en-US" dirty="0"/>
+            <a:endParaRPr lang="en-US"/>
           </a:p>
         </p:txBody>
       </p:sp>
@@ -1447,7 +1443,7 @@
           <a:bodyPr/>
           <a:lstStyle/>
           <a:p>
-            <a:endParaRPr lang="en-US" dirty="0"/>
+            <a:endParaRPr lang="en-US"/>
           </a:p>
         </p:txBody>
       </p:sp>
@@ -1531,7 +1527,7 @@
           <a:bodyPr/>
           <a:lstStyle/>
           <a:p>
-            <a:endParaRPr lang="en-US" dirty="0"/>
+            <a:endParaRPr lang="en-US"/>
           </a:p>
         </p:txBody>
       </p:sp>
@@ -1958,7 +1954,7 @@
               <a:buNone/>
             </a:pPr>
             <a:r>
-              <a:rPr lang="en-US" sz="4400" b="1" dirty="0">
+              <a:rPr lang="en-US" sz="4400" b="1">
                 <a:solidFill>
                   <a:srgbClr val="FFFFFF"/>
                 </a:solidFill>
@@ -1968,14 +1964,14 @@
               </a:rPr>
               <a:t>Financial Risk &amp;</a:t>
             </a:r>
-            <a:endParaRPr lang="en-US" sz="4400" dirty="0"/>
-          </a:p>
-          <a:p>
-            <a:pPr marL="0" indent="0">
-              <a:buNone/>
-            </a:pPr>
-            <a:r>
-              <a:rPr lang="en-US" sz="4400" b="1" dirty="0">
+            <a:endParaRPr lang="en-US" sz="4400"/>
+          </a:p>
+          <a:p>
+            <a:pPr marL="0" indent="0">
+              <a:buNone/>
+            </a:pPr>
+            <a:r>
+              <a:rPr lang="en-US" sz="4400" b="1">
                 <a:solidFill>
                   <a:srgbClr val="FFFFFF"/>
                 </a:solidFill>
@@ -1985,7 +1981,7 @@
               </a:rPr>
               <a:t>Data Integrity Audit</a:t>
             </a:r>
-            <a:endParaRPr lang="en-US" sz="4400" dirty="0"/>
+            <a:endParaRPr lang="en-US" sz="4400"/>
           </a:p>
         </p:txBody>
       </p:sp>
@@ -2014,7 +2010,7 @@
               <a:buNone/>
             </a:pPr>
             <a:r>
-              <a:rPr lang="en-US" sz="1900" i="1" dirty="0">
+              <a:rPr lang="en-US" sz="1900" i="1">
                 <a:solidFill>
                   <a:srgbClr val="A8D4E8"/>
                 </a:solidFill>
@@ -2024,7 +2020,7 @@
               </a:rPr>
               <a:t>Analyzing Loan Default Risk Using Machine Learning</a:t>
             </a:r>
-            <a:endParaRPr lang="en-US" sz="1900" dirty="0"/>
+            <a:endParaRPr lang="en-US" sz="1900"/>
           </a:p>
         </p:txBody>
       </p:sp>
@@ -2053,7 +2049,7 @@
               <a:buNone/>
             </a:pPr>
             <a:r>
-              <a:rPr lang="en-US" sz="1500" b="1" dirty="0">
+              <a:rPr lang="en-US" sz="1500" b="1">
                 <a:solidFill>
                   <a:srgbClr val="FFFFFF"/>
                 </a:solidFill>
@@ -2063,7 +2059,7 @@
               </a:rPr>
               <a:t>Kevin Sayavong  |  Data Analytics Bootcamp  |  Capstone Project</a:t>
             </a:r>
-            <a:endParaRPr lang="en-US" sz="1500" dirty="0"/>
+            <a:endParaRPr lang="en-US" sz="1500"/>
           </a:p>
         </p:txBody>
       </p:sp>
@@ -2092,7 +2088,7 @@
               <a:buNone/>
             </a:pPr>
             <a:r>
-              <a:rPr lang="en-US" sz="1200" dirty="0">
+              <a:rPr lang="en-US" sz="1200">
                 <a:solidFill>
                   <a:srgbClr val="CCE8F4"/>
                 </a:solidFill>
@@ -2102,7 +2098,7 @@
               </a:rPr>
               <a:t>Dataset: LendingClub Loan Data (Kaggle)  |  9,578 Records  |  Logistic Regression Model</a:t>
             </a:r>
-            <a:endParaRPr lang="en-US" sz="1200" dirty="0"/>
+            <a:endParaRPr lang="en-US" sz="1200"/>
           </a:p>
         </p:txBody>
       </p:sp>
@@ -2189,7 +2185,7 @@
               <a:buNone/>
             </a:pPr>
             <a:r>
-              <a:rPr lang="en-US" sz="2400" b="1" dirty="0">
+              <a:rPr lang="en-US" sz="2400" b="1">
                 <a:solidFill>
                   <a:srgbClr val="FFFFFF"/>
                 </a:solidFill>
@@ -2199,7 +2195,7 @@
               </a:rPr>
               <a:t>Predictive Model Results</a:t>
             </a:r>
-            <a:endParaRPr lang="en-US" sz="2400" dirty="0"/>
+            <a:endParaRPr lang="en-US" sz="2400"/>
           </a:p>
         </p:txBody>
       </p:sp>
@@ -2228,7 +2224,7 @@
               <a:buNone/>
             </a:pPr>
             <a:r>
-              <a:rPr lang="en-US" sz="1200" i="1" dirty="0">
+              <a:rPr lang="en-US" sz="1200" i="1">
                 <a:solidFill>
                   <a:srgbClr val="A8D4E8"/>
                 </a:solidFill>
@@ -2238,7 +2234,7 @@
               </a:rPr>
               <a:t>Logistic Regression — Balanced Dataset — 80/20 Train/Test Split</a:t>
             </a:r>
-            <a:endParaRPr lang="en-US" sz="1200" dirty="0"/>
+            <a:endParaRPr lang="en-US" sz="1200"/>
           </a:p>
         </p:txBody>
       </p:sp>
@@ -2292,7 +2288,7 @@
               <a:buNone/>
             </a:pPr>
             <a:r>
-              <a:rPr lang="en-US" sz="900" dirty="0">
+              <a:rPr lang="en-US" sz="900">
                 <a:solidFill>
                   <a:srgbClr val="64748B"/>
                 </a:solidFill>
@@ -2302,7 +2298,7 @@
               </a:rPr>
               <a:t>Kevin Sayavong  |  Data Analytics Capstone  |  LendingClub Loan Default Analysis</a:t>
             </a:r>
-            <a:endParaRPr lang="en-US" sz="900" dirty="0"/>
+            <a:endParaRPr lang="en-US" sz="900"/>
           </a:p>
         </p:txBody>
       </p:sp>
@@ -2355,7 +2351,7 @@
               <a:buNone/>
             </a:pPr>
             <a:r>
-              <a:rPr lang="en-US" sz="900" i="1" dirty="0">
+              <a:rPr lang="en-US" sz="900" i="1">
                 <a:solidFill>
                   <a:srgbClr val="64748B"/>
                 </a:solidFill>
@@ -2365,7 +2361,7 @@
               </a:rPr>
               <a:t>Confusion matrix on held-out test data</a:t>
             </a:r>
-            <a:endParaRPr lang="en-US" sz="900" dirty="0"/>
+            <a:endParaRPr lang="en-US" sz="900"/>
           </a:p>
         </p:txBody>
       </p:sp>
@@ -2421,7 +2417,7 @@
               <a:buNone/>
             </a:pPr>
             <a:r>
-              <a:rPr lang="en-US" sz="2600" b="1" dirty="0">
+              <a:rPr lang="en-US" sz="2600" b="1">
                 <a:solidFill>
                   <a:srgbClr val="FFFFFF"/>
                 </a:solidFill>
@@ -2431,7 +2427,7 @@
               </a:rPr>
               <a:t>62%</a:t>
             </a:r>
-            <a:endParaRPr lang="en-US" sz="2600" dirty="0"/>
+            <a:endParaRPr lang="en-US" sz="2600"/>
           </a:p>
         </p:txBody>
       </p:sp>
@@ -2460,7 +2456,7 @@
               <a:buNone/>
             </a:pPr>
             <a:r>
-              <a:rPr lang="en-US" sz="1000" dirty="0">
+              <a:rPr lang="en-US" sz="1000">
                 <a:solidFill>
                   <a:srgbClr val="CCE8F4"/>
                 </a:solidFill>
@@ -2470,7 +2466,7 @@
               </a:rPr>
               <a:t>Overall Accuracy</a:t>
             </a:r>
-            <a:endParaRPr lang="en-US" sz="1000" dirty="0"/>
+            <a:endParaRPr lang="en-US" sz="1000"/>
           </a:p>
         </p:txBody>
       </p:sp>
@@ -2526,7 +2522,7 @@
               <a:buNone/>
             </a:pPr>
             <a:r>
-              <a:rPr lang="en-US" sz="2600" b="1" dirty="0">
+              <a:rPr lang="en-US" sz="2600" b="1">
                 <a:solidFill>
                   <a:srgbClr val="FFFFFF"/>
                 </a:solidFill>
@@ -2536,7 +2532,7 @@
               </a:rPr>
               <a:t>61%</a:t>
             </a:r>
-            <a:endParaRPr lang="en-US" sz="2600" dirty="0"/>
+            <a:endParaRPr lang="en-US" sz="2600"/>
           </a:p>
         </p:txBody>
       </p:sp>
@@ -2565,7 +2561,7 @@
               <a:buNone/>
             </a:pPr>
             <a:r>
-              <a:rPr lang="en-US" sz="1000" dirty="0">
+              <a:rPr lang="en-US" sz="1000">
                 <a:solidFill>
                   <a:srgbClr val="CCE8F4"/>
                 </a:solidFill>
@@ -2575,14 +2571,14 @@
               </a:rPr>
               <a:t>Default Recall</a:t>
             </a:r>
-            <a:endParaRPr lang="en-US" sz="1000" dirty="0"/>
+            <a:endParaRPr lang="en-US" sz="1000"/>
           </a:p>
           <a:p>
             <a:pPr marL="0" indent="0" algn="ctr">
               <a:buNone/>
             </a:pPr>
             <a:r>
-              <a:rPr lang="en-US" sz="1000" dirty="0">
+              <a:rPr lang="en-US" sz="1000">
                 <a:solidFill>
                   <a:srgbClr val="CCE8F4"/>
                 </a:solidFill>
@@ -2592,7 +2588,7 @@
               </a:rPr>
               <a:t>(defaults caught)</a:t>
             </a:r>
-            <a:endParaRPr lang="en-US" sz="1000" dirty="0"/>
+            <a:endParaRPr lang="en-US" sz="1000"/>
           </a:p>
         </p:txBody>
       </p:sp>
@@ -2648,7 +2644,7 @@
               <a:buNone/>
             </a:pPr>
             <a:r>
-              <a:rPr lang="en-US" sz="2600" b="1" dirty="0">
+              <a:rPr lang="en-US" sz="2600" b="1">
                 <a:solidFill>
                   <a:srgbClr val="FFFFFF"/>
                 </a:solidFill>
@@ -2658,7 +2654,7 @@
               </a:rPr>
               <a:t>64%</a:t>
             </a:r>
-            <a:endParaRPr lang="en-US" sz="2600" dirty="0"/>
+            <a:endParaRPr lang="en-US" sz="2600"/>
           </a:p>
         </p:txBody>
       </p:sp>
@@ -2687,7 +2683,7 @@
               <a:buNone/>
             </a:pPr>
             <a:r>
-              <a:rPr lang="en-US" sz="1000" dirty="0">
+              <a:rPr lang="en-US" sz="1000">
                 <a:solidFill>
                   <a:srgbClr val="CCE8F4"/>
                 </a:solidFill>
@@ -2697,7 +2693,7 @@
               </a:rPr>
               <a:t>Default Precision</a:t>
             </a:r>
-            <a:endParaRPr lang="en-US" sz="1000" dirty="0"/>
+            <a:endParaRPr lang="en-US" sz="1000"/>
           </a:p>
         </p:txBody>
       </p:sp>
@@ -2751,7 +2747,7 @@
               <a:buNone/>
             </a:pPr>
             <a:r>
-              <a:rPr lang="en-US" sz="1200" b="1" dirty="0">
+              <a:rPr lang="en-US" sz="1200" b="1">
                 <a:solidFill>
                   <a:srgbClr val="065A82"/>
                 </a:solidFill>
@@ -2761,7 +2757,7 @@
               </a:rPr>
               <a:t>How to interpret these results</a:t>
             </a:r>
-            <a:endParaRPr lang="en-US" sz="1200" dirty="0"/>
+            <a:endParaRPr lang="en-US" sz="1200"/>
           </a:p>
         </p:txBody>
       </p:sp>
@@ -2790,7 +2786,7 @@
               <a:buNone/>
             </a:pPr>
             <a:r>
-              <a:rPr lang="en-US" sz="1100" dirty="0">
+              <a:rPr lang="en-US" sz="1100">
                 <a:solidFill>
                   <a:srgbClr val="2D3748"/>
                 </a:solidFill>
@@ -2800,7 +2796,7 @@
               </a:rPr>
               <a:t>• Our model catches 61% of actual defaults.</a:t>
             </a:r>
-            <a:endParaRPr lang="en-US" sz="1100" dirty="0"/>
+            <a:endParaRPr lang="en-US" sz="1100"/>
           </a:p>
         </p:txBody>
       </p:sp>
@@ -2829,7 +2825,7 @@
               <a:buNone/>
             </a:pPr>
             <a:r>
-              <a:rPr lang="en-US" sz="1100" dirty="0">
+              <a:rPr lang="en-US" sz="1100">
                 <a:solidFill>
                   <a:srgbClr val="2D3748"/>
                 </a:solidFill>
@@ -2839,7 +2835,7 @@
               </a:rPr>
               <a:t>• A model that always predicts "repaid" would be 84% accurate — but catch 0% of defaults.</a:t>
             </a:r>
-            <a:endParaRPr lang="en-US" sz="1100" dirty="0"/>
+            <a:endParaRPr lang="en-US" sz="1100"/>
           </a:p>
         </p:txBody>
       </p:sp>
@@ -2868,7 +2864,7 @@
               <a:buNone/>
             </a:pPr>
             <a:r>
-              <a:rPr lang="en-US" sz="1100" b="1" dirty="0">
+              <a:rPr lang="en-US" sz="1100" b="1">
                 <a:solidFill>
                   <a:srgbClr val="B85042"/>
                 </a:solidFill>
@@ -2878,7 +2874,7 @@
               </a:rPr>
               <a:t>• 62% is only 12 points above random chance (50%). This model needs further development before real-world use.</a:t>
             </a:r>
-            <a:endParaRPr lang="en-US" sz="1100" dirty="0"/>
+            <a:endParaRPr lang="en-US" sz="1100"/>
           </a:p>
         </p:txBody>
       </p:sp>
@@ -2907,7 +2903,7 @@
               <a:buNone/>
             </a:pPr>
             <a:r>
-              <a:rPr lang="en-US" sz="1100" dirty="0">
+              <a:rPr lang="en-US" sz="1100">
                 <a:solidFill>
                   <a:srgbClr val="2D3748"/>
                 </a:solidFill>
@@ -2917,7 +2913,7 @@
               </a:rPr>
               <a:t>• To improve: add payment history, employment duration, total assets, and bank account data.</a:t>
             </a:r>
-            <a:endParaRPr lang="en-US" sz="1100" dirty="0"/>
+            <a:endParaRPr lang="en-US" sz="1100"/>
           </a:p>
         </p:txBody>
       </p:sp>
@@ -3004,7 +3000,7 @@
               <a:buNone/>
             </a:pPr>
             <a:r>
-              <a:rPr lang="en-US" sz="2400" b="1" dirty="0">
+              <a:rPr lang="en-US" sz="2400" b="1">
                 <a:solidFill>
                   <a:srgbClr val="FFFFFF"/>
                 </a:solidFill>
@@ -3014,7 +3010,7 @@
               </a:rPr>
               <a:t>What the Model Learned</a:t>
             </a:r>
-            <a:endParaRPr lang="en-US" sz="2400" dirty="0"/>
+            <a:endParaRPr lang="en-US" sz="2400"/>
           </a:p>
         </p:txBody>
       </p:sp>
@@ -3043,7 +3039,7 @@
               <a:buNone/>
             </a:pPr>
             <a:r>
-              <a:rPr lang="en-US" sz="1200" i="1" dirty="0">
+              <a:rPr lang="en-US" sz="1200" i="1">
                 <a:solidFill>
                   <a:srgbClr val="A8D4E8"/>
                 </a:solidFill>
@@ -3053,7 +3049,7 @@
               </a:rPr>
               <a:t>Comparing model coefficients to the correlation analysis</a:t>
             </a:r>
-            <a:endParaRPr lang="en-US" sz="1200" dirty="0"/>
+            <a:endParaRPr lang="en-US" sz="1200"/>
           </a:p>
         </p:txBody>
       </p:sp>
@@ -3107,7 +3103,7 @@
               <a:buNone/>
             </a:pPr>
             <a:r>
-              <a:rPr lang="en-US" sz="900" dirty="0">
+              <a:rPr lang="en-US" sz="900">
                 <a:solidFill>
                   <a:srgbClr val="64748B"/>
                 </a:solidFill>
@@ -3117,7 +3113,7 @@
               </a:rPr>
               <a:t>Kevin Sayavong  |  Data Analytics Capstone  |  LendingClub Loan Default Analysis</a:t>
             </a:r>
-            <a:endParaRPr lang="en-US" sz="900" dirty="0"/>
+            <a:endParaRPr lang="en-US" sz="900"/>
           </a:p>
         </p:txBody>
       </p:sp>
@@ -3170,7 +3166,7 @@
               <a:buNone/>
             </a:pPr>
             <a:r>
-              <a:rPr lang="en-US" sz="1300" b="1" dirty="0">
+              <a:rPr lang="en-US" sz="1300" b="1">
                 <a:solidFill>
                   <a:srgbClr val="065A82"/>
                 </a:solidFill>
@@ -3180,7 +3176,7 @@
               </a:rPr>
               <a:t>Notable shifts vs. Correlation:</a:t>
             </a:r>
-            <a:endParaRPr lang="en-US" sz="1300" dirty="0"/>
+            <a:endParaRPr lang="en-US" sz="1300"/>
           </a:p>
         </p:txBody>
       </p:sp>
@@ -3259,7 +3255,7 @@
               <a:buNone/>
             </a:pPr>
             <a:r>
-              <a:rPr lang="en-US" sz="1000" dirty="0">
+              <a:rPr lang="en-US" sz="1000">
                 <a:solidFill>
                   <a:srgbClr val="2D3748"/>
                 </a:solidFill>
@@ -3269,14 +3265,14 @@
               </a:rPr>
               <a:t>Correlation: Interest Rate = #1 risk signal</a:t>
             </a:r>
-            <a:endParaRPr lang="en-US" sz="1000" dirty="0"/>
-          </a:p>
-          <a:p>
-            <a:pPr marL="0" indent="0">
-              <a:buNone/>
-            </a:pPr>
-            <a:r>
-              <a:rPr lang="en-US" sz="1000" dirty="0">
+            <a:endParaRPr lang="en-US" sz="1000"/>
+          </a:p>
+          <a:p>
+            <a:pPr marL="0" indent="0">
+              <a:buNone/>
+            </a:pPr>
+            <a:r>
+              <a:rPr lang="en-US" sz="1000">
                 <a:solidFill>
                   <a:srgbClr val="2D3748"/>
                 </a:solidFill>
@@ -3286,7 +3282,7 @@
               </a:rPr>
               <a:t>Model: Inquiries in Last 6 Months moved to strongest predictor of default</a:t>
             </a:r>
-            <a:endParaRPr lang="en-US" sz="1000" dirty="0"/>
+            <a:endParaRPr lang="en-US" sz="1000"/>
           </a:p>
         </p:txBody>
       </p:sp>
@@ -3365,7 +3361,7 @@
               <a:buNone/>
             </a:pPr>
             <a:r>
-              <a:rPr lang="en-US" sz="1000" dirty="0">
+              <a:rPr lang="en-US" sz="1000">
                 <a:solidFill>
                   <a:srgbClr val="2D3748"/>
                 </a:solidFill>
@@ -3375,14 +3371,14 @@
               </a:rPr>
               <a:t>Correlation: FICO = top protective signal</a:t>
             </a:r>
-            <a:endParaRPr lang="en-US" sz="1000" dirty="0"/>
-          </a:p>
-          <a:p>
-            <a:pPr marL="0" indent="0">
-              <a:buNone/>
-            </a:pPr>
-            <a:r>
-              <a:rPr lang="en-US" sz="1000" dirty="0">
+            <a:endParaRPr lang="en-US" sz="1000"/>
+          </a:p>
+          <a:p>
+            <a:pPr marL="0" indent="0">
+              <a:buNone/>
+            </a:pPr>
+            <a:r>
+              <a:rPr lang="en-US" sz="1000">
                 <a:solidFill>
                   <a:srgbClr val="2D3748"/>
                 </a:solidFill>
@@ -3392,7 +3388,7 @@
               </a:rPr>
               <a:t>Model: FICO remains strong, but Log Annual Income emerged as equally important</a:t>
             </a:r>
-            <a:endParaRPr lang="en-US" sz="1000" dirty="0"/>
+            <a:endParaRPr lang="en-US" sz="1000"/>
           </a:p>
         </p:txBody>
       </p:sp>
@@ -3471,7 +3467,7 @@
               <a:buNone/>
             </a:pPr>
             <a:r>
-              <a:rPr lang="en-US" sz="1000" dirty="0">
+              <a:rPr lang="en-US" sz="1000">
                 <a:solidFill>
                   <a:srgbClr val="2D3748"/>
                 </a:solidFill>
@@ -3481,7 +3477,7 @@
               </a:rPr>
               <a:t>Installment as Percent of Income* appears in both — but small effect size suggests caution in over-relying on it</a:t>
             </a:r>
-            <a:endParaRPr lang="en-US" sz="1000" dirty="0"/>
+            <a:endParaRPr lang="en-US" sz="1000"/>
           </a:p>
         </p:txBody>
       </p:sp>
@@ -3560,7 +3556,7 @@
               <a:buNone/>
             </a:pPr>
             <a:r>
-              <a:rPr lang="en-US" sz="1000" dirty="0">
+              <a:rPr lang="en-US" sz="1000">
                 <a:solidFill>
                   <a:srgbClr val="2D3748"/>
                 </a:solidFill>
@@ -3570,7 +3566,7 @@
               </a:rPr>
               <a:t>* Not in original dataset. Presence in both analyses supports further exploration</a:t>
             </a:r>
-            <a:endParaRPr lang="en-US" sz="1000" dirty="0"/>
+            <a:endParaRPr lang="en-US" sz="1000"/>
           </a:p>
         </p:txBody>
       </p:sp>
@@ -3657,7 +3653,7 @@
               <a:buNone/>
             </a:pPr>
             <a:r>
-              <a:rPr lang="en-US" sz="2400" b="1" dirty="0">
+              <a:rPr lang="en-US" sz="2400" b="1">
                 <a:solidFill>
                   <a:srgbClr val="FFFFFF"/>
                 </a:solidFill>
@@ -3667,7 +3663,7 @@
               </a:rPr>
               <a:t>Recommendations &amp; Conclusion</a:t>
             </a:r>
-            <a:endParaRPr lang="en-US" sz="2400" dirty="0"/>
+            <a:endParaRPr lang="en-US" sz="2400"/>
           </a:p>
         </p:txBody>
       </p:sp>
@@ -3696,7 +3692,7 @@
               <a:buNone/>
             </a:pPr>
             <a:r>
-              <a:rPr lang="en-US" sz="1200" i="1" dirty="0">
+              <a:rPr lang="en-US" sz="1200" i="1">
                 <a:solidFill>
                   <a:srgbClr val="A8D4E8"/>
                 </a:solidFill>
@@ -3706,7 +3702,7 @@
               </a:rPr>
               <a:t>What the data suggests — and where to go from here</a:t>
             </a:r>
-            <a:endParaRPr lang="en-US" sz="1200" dirty="0"/>
+            <a:endParaRPr lang="en-US" sz="1200"/>
           </a:p>
         </p:txBody>
       </p:sp>
@@ -3760,7 +3756,7 @@
               <a:buNone/>
             </a:pPr>
             <a:r>
-              <a:rPr lang="en-US" sz="900" dirty="0">
+              <a:rPr lang="en-US" sz="900">
                 <a:solidFill>
                   <a:srgbClr val="64748B"/>
                 </a:solidFill>
@@ -3770,7 +3766,7 @@
               </a:rPr>
               <a:t>Kevin Sayavong  |  Data Analytics Capstone  |  LendingClub Loan Default Analysis</a:t>
             </a:r>
-            <a:endParaRPr lang="en-US" sz="900" dirty="0"/>
+            <a:endParaRPr lang="en-US" sz="900"/>
           </a:p>
         </p:txBody>
       </p:sp>
@@ -3851,7 +3847,7 @@
               <a:buNone/>
             </a:pPr>
             <a:r>
-              <a:rPr lang="en-US" sz="1300" b="1" dirty="0">
+              <a:rPr lang="en-US" sz="1300" b="1">
                 <a:solidFill>
                   <a:srgbClr val="FFFFFF"/>
                 </a:solidFill>
@@ -3861,7 +3857,7 @@
               </a:rPr>
               <a:t>1</a:t>
             </a:r>
-            <a:endParaRPr lang="en-US" sz="1300" dirty="0"/>
+            <a:endParaRPr lang="en-US" sz="1300"/>
           </a:p>
         </p:txBody>
       </p:sp>
@@ -3890,7 +3886,7 @@
               <a:buNone/>
             </a:pPr>
             <a:r>
-              <a:rPr lang="en-US" sz="1200" b="1" dirty="0">
+              <a:rPr lang="en-US" sz="1200" b="1">
                 <a:solidFill>
                   <a:srgbClr val="1C7293"/>
                 </a:solidFill>
@@ -3900,7 +3896,7 @@
               </a:rPr>
               <a:t>Further Explore Payment Burden Metrics</a:t>
             </a:r>
-            <a:endParaRPr lang="en-US" sz="1200" dirty="0"/>
+            <a:endParaRPr lang="en-US" sz="1200"/>
           </a:p>
         </p:txBody>
       </p:sp>
@@ -3929,7 +3925,7 @@
               <a:buNone/>
             </a:pPr>
             <a:r>
-              <a:rPr lang="en-US" sz="1100" dirty="0">
+              <a:rPr lang="en-US" sz="1100">
                 <a:solidFill>
                   <a:srgbClr val="2D3748"/>
                 </a:solidFill>
@@ -3939,7 +3935,7 @@
               </a:rPr>
               <a:t>Installment as Percent of Income showed a significant but small effect. Other calculations — total debt service ratio, liquid asset coverage — may prove more predictive. More data science work is needed.</a:t>
             </a:r>
-            <a:endParaRPr lang="en-US" sz="1100" dirty="0"/>
+            <a:endParaRPr lang="en-US" sz="1100"/>
           </a:p>
         </p:txBody>
       </p:sp>
@@ -4020,7 +4016,7 @@
               <a:buNone/>
             </a:pPr>
             <a:r>
-              <a:rPr lang="en-US" sz="1300" b="1" dirty="0">
+              <a:rPr lang="en-US" sz="1300" b="1">
                 <a:solidFill>
                   <a:srgbClr val="FFFFFF"/>
                 </a:solidFill>
@@ -4030,7 +4026,7 @@
               </a:rPr>
               <a:t>2</a:t>
             </a:r>
-            <a:endParaRPr lang="en-US" sz="1300" dirty="0"/>
+            <a:endParaRPr lang="en-US" sz="1300"/>
           </a:p>
         </p:txBody>
       </p:sp>
@@ -4059,7 +4055,7 @@
               <a:buNone/>
             </a:pPr>
             <a:r>
-              <a:rPr lang="en-US" sz="1200" b="1" dirty="0">
+              <a:rPr lang="en-US" sz="1200" b="1">
                 <a:solidFill>
                   <a:srgbClr val="065A82"/>
                 </a:solidFill>
@@ -4069,7 +4065,7 @@
               </a:rPr>
               <a:t>Separate Risk Framework for Small Business</a:t>
             </a:r>
-            <a:endParaRPr lang="en-US" sz="1200" dirty="0"/>
+            <a:endParaRPr lang="en-US" sz="1200"/>
           </a:p>
         </p:txBody>
       </p:sp>
@@ -4098,7 +4094,7 @@
               <a:buNone/>
             </a:pPr>
             <a:r>
-              <a:rPr lang="en-US" sz="1100" dirty="0">
+              <a:rPr lang="en-US" sz="1100">
                 <a:solidFill>
                   <a:srgbClr val="2D3748"/>
                 </a:solidFill>
@@ -4108,7 +4104,7 @@
               </a:rPr>
               <a:t>At 27.8% default — nearly double the platform average — small business loans warrant higher FICO minimums or adjusted interest rate pricing.</a:t>
             </a:r>
-            <a:endParaRPr lang="en-US" sz="1100" dirty="0"/>
+            <a:endParaRPr lang="en-US" sz="1100"/>
           </a:p>
         </p:txBody>
       </p:sp>
@@ -4189,7 +4185,7 @@
               <a:buNone/>
             </a:pPr>
             <a:r>
-              <a:rPr lang="en-US" sz="1300" b="1" dirty="0">
+              <a:rPr lang="en-US" sz="1300" b="1">
                 <a:solidFill>
                   <a:srgbClr val="FFFFFF"/>
                 </a:solidFill>
@@ -4199,7 +4195,7 @@
               </a:rPr>
               <a:t>3</a:t>
             </a:r>
-            <a:endParaRPr lang="en-US" sz="1300" dirty="0"/>
+            <a:endParaRPr lang="en-US" sz="1300"/>
           </a:p>
         </p:txBody>
       </p:sp>
@@ -4228,7 +4224,7 @@
               <a:buNone/>
             </a:pPr>
             <a:r>
-              <a:rPr lang="en-US" sz="1200" b="1" dirty="0">
+              <a:rPr lang="en-US" sz="1200" b="1">
                 <a:solidFill>
                   <a:srgbClr val="B85042"/>
                 </a:solidFill>
@@ -4238,7 +4234,7 @@
               </a:rPr>
               <a:t>Flag 4+ Inquiries for Underwriting Review</a:t>
             </a:r>
-            <a:endParaRPr lang="en-US" sz="1200" dirty="0"/>
+            <a:endParaRPr lang="en-US" sz="1200"/>
           </a:p>
         </p:txBody>
       </p:sp>
@@ -4267,7 +4263,7 @@
               <a:buNone/>
             </a:pPr>
             <a:r>
-              <a:rPr lang="en-US" sz="1100" dirty="0">
+              <a:rPr lang="en-US" sz="1100">
                 <a:solidFill>
                   <a:srgbClr val="2D3748"/>
                 </a:solidFill>
@@ -4277,7 +4273,7 @@
               </a:rPr>
               <a:t>At 4+ inquiries, defaulted borrowers are more than 2x as likely to hit that threshold (23.2% vs. 10.9%). This could indicate financial stress — use as a flag for additional manual review, not automatic denial.</a:t>
             </a:r>
-            <a:endParaRPr lang="en-US" sz="1100" dirty="0"/>
+            <a:endParaRPr lang="en-US" sz="1100"/>
           </a:p>
         </p:txBody>
       </p:sp>
@@ -4358,7 +4354,7 @@
               <a:buNone/>
             </a:pPr>
             <a:r>
-              <a:rPr lang="en-US" sz="1300" b="1" dirty="0">
+              <a:rPr lang="en-US" sz="1300" b="1">
                 <a:solidFill>
                   <a:srgbClr val="FFFFFF"/>
                 </a:solidFill>
@@ -4368,7 +4364,7 @@
               </a:rPr>
               <a:t>4</a:t>
             </a:r>
-            <a:endParaRPr lang="en-US" sz="1300" dirty="0"/>
+            <a:endParaRPr lang="en-US" sz="1300"/>
           </a:p>
         </p:txBody>
       </p:sp>
@@ -4397,7 +4393,7 @@
               <a:buNone/>
             </a:pPr>
             <a:r>
-              <a:rPr lang="en-US" sz="1200" b="1" dirty="0">
+              <a:rPr lang="en-US" sz="1200" b="1">
                 <a:solidFill>
                   <a:srgbClr val="2E7D32"/>
                 </a:solidFill>
@@ -4407,7 +4403,7 @@
               </a:rPr>
               <a:t>Improve the Model With Additional Data</a:t>
             </a:r>
-            <a:endParaRPr lang="en-US" sz="1200" dirty="0"/>
+            <a:endParaRPr lang="en-US" sz="1200"/>
           </a:p>
         </p:txBody>
       </p:sp>
@@ -4436,7 +4432,7 @@
               <a:buNone/>
             </a:pPr>
             <a:r>
-              <a:rPr lang="en-US" sz="1100" dirty="0">
+              <a:rPr lang="en-US" sz="1100">
                 <a:solidFill>
                   <a:srgbClr val="2D3748"/>
                 </a:solidFill>
@@ -4446,7 +4442,7 @@
               </a:rPr>
               <a:t>Debt-service-to-income ratio (DTI) is already standard in mortgage lending and adds signal beyond FICO and interest rate alone. Adding payment history, total assets, employment duration, and bank account activity would further increase accuracy.</a:t>
             </a:r>
-            <a:endParaRPr lang="en-US" sz="1100" dirty="0"/>
+            <a:endParaRPr lang="en-US" sz="1100"/>
           </a:p>
         </p:txBody>
       </p:sp>
@@ -4533,7 +4529,7 @@
               <a:buNone/>
             </a:pPr>
             <a:r>
-              <a:rPr lang="en-US" sz="6000" b="1" dirty="0">
+              <a:rPr lang="en-US" sz="6000" b="1">
                 <a:solidFill>
                   <a:srgbClr val="FFFFFF"/>
                 </a:solidFill>
@@ -4543,7 +4539,7 @@
               </a:rPr>
               <a:t>Thank You</a:t>
             </a:r>
-            <a:endParaRPr lang="en-US" sz="6000" dirty="0"/>
+            <a:endParaRPr lang="en-US" sz="6000"/>
           </a:p>
         </p:txBody>
       </p:sp>
@@ -4572,7 +4568,7 @@
               <a:buNone/>
             </a:pPr>
             <a:r>
-              <a:rPr lang="en-US" sz="2400" i="1" dirty="0">
+              <a:rPr lang="en-US" sz="2400" i="1">
                 <a:solidFill>
                   <a:srgbClr val="A8D4E8"/>
                 </a:solidFill>
@@ -4582,7 +4578,7 @@
               </a:rPr>
               <a:t>Questions Welcome</a:t>
             </a:r>
-            <a:endParaRPr lang="en-US" sz="2400" dirty="0"/>
+            <a:endParaRPr lang="en-US" sz="2400"/>
           </a:p>
         </p:txBody>
       </p:sp>
@@ -4611,7 +4607,7 @@
               <a:buNone/>
             </a:pPr>
             <a:r>
-              <a:rPr lang="en-US" sz="1400" b="1" dirty="0">
+              <a:rPr lang="en-US" sz="1400" b="1">
                 <a:solidFill>
                   <a:srgbClr val="FFFFFF"/>
                 </a:solidFill>
@@ -4621,7 +4617,7 @@
               </a:rPr>
               <a:t>Kevin Sayavong  |  Data Analytics Bootcamp  |  Dataset: LendingClub Loan Data, Kaggle</a:t>
             </a:r>
-            <a:endParaRPr lang="en-US" sz="1400" dirty="0"/>
+            <a:endParaRPr lang="en-US" sz="1400"/>
           </a:p>
         </p:txBody>
       </p:sp>
@@ -4648,7 +4644,7 @@
           <a:p>
             <a:pPr algn="ctr"/>
             <a:r>
-              <a:rPr lang="en-US" sz="1100" dirty="0">
+              <a:rPr lang="en-US" sz="1100">
                 <a:solidFill>
                   <a:srgbClr val="CCE8F4"/>
                 </a:solidFill>
@@ -4659,7 +4655,7 @@
               <a:t>loan_data_Python_Data3.csv  |  Logistic Regression  |  </a:t>
             </a:r>
             <a:r>
-              <a:rPr lang="en-US" sz="1100" dirty="0" err="1">
+              <a:rPr lang="en-US" sz="1100" err="1">
                 <a:solidFill>
                   <a:srgbClr val="CCE8F4"/>
                 </a:solidFill>
@@ -4670,7 +4666,7 @@
               <a:t>sklearn</a:t>
             </a:r>
             <a:r>
-              <a:rPr lang="en-US" sz="1100" dirty="0">
+              <a:rPr lang="en-US" sz="1100">
                 <a:solidFill>
                   <a:srgbClr val="CCE8F4"/>
                 </a:solidFill>
@@ -4681,7 +4677,7 @@
               <a:t> · pandas · </a:t>
             </a:r>
             <a:r>
-              <a:rPr lang="en-US" sz="1100" dirty="0" err="1">
+              <a:rPr lang="en-US" sz="1100" err="1">
                 <a:solidFill>
                   <a:srgbClr val="CCE8F4"/>
                 </a:solidFill>
@@ -4692,7 +4688,7 @@
               <a:t>numpy</a:t>
             </a:r>
             <a:r>
-              <a:rPr lang="en-US" sz="1100" dirty="0">
+              <a:rPr lang="en-US" sz="1100">
                 <a:solidFill>
                   <a:srgbClr val="CCE8F4"/>
                 </a:solidFill>
@@ -4703,7 +4699,7 @@
               <a:t> · </a:t>
             </a:r>
             <a:r>
-              <a:rPr lang="en-US" sz="1100" dirty="0" err="1">
+              <a:rPr lang="en-US" sz="1100" err="1">
                 <a:solidFill>
                   <a:srgbClr val="CCE8F4"/>
                 </a:solidFill>
@@ -4714,7 +4710,7 @@
               <a:t>scipy</a:t>
             </a:r>
             <a:r>
-              <a:rPr lang="en-US" sz="1100" dirty="0">
+              <a:rPr lang="en-US" sz="1100">
                 <a:solidFill>
                   <a:srgbClr val="CCE8F4"/>
                 </a:solidFill>
@@ -4725,7 +4721,7 @@
               <a:t> · </a:t>
             </a:r>
             <a:r>
-              <a:rPr lang="en-US" sz="1100" dirty="0" err="1">
+              <a:rPr lang="en-US" sz="1100" err="1">
                 <a:solidFill>
                   <a:srgbClr val="CCE8F4"/>
                 </a:solidFill>
@@ -4736,7 +4732,7 @@
               <a:t>matplolib</a:t>
             </a:r>
             <a:r>
-              <a:rPr lang="en-US" sz="1100" dirty="0">
+              <a:rPr lang="en-US" sz="1100">
                 <a:solidFill>
                   <a:srgbClr val="CCE8F4"/>
                 </a:solidFill>
@@ -4746,7 +4742,7 @@
               </a:rPr>
               <a:t> · seaborn</a:t>
             </a:r>
-            <a:endParaRPr lang="en-US" sz="1100" dirty="0"/>
+            <a:endParaRPr lang="en-US" sz="1100"/>
           </a:p>
         </p:txBody>
       </p:sp>
@@ -4833,7 +4829,7 @@
               <a:buNone/>
             </a:pPr>
             <a:r>
-              <a:rPr lang="en-US" sz="2400" b="1" dirty="0">
+              <a:rPr lang="en-US" sz="2400" b="1">
                 <a:solidFill>
                   <a:srgbClr val="FFFFFF"/>
                 </a:solidFill>
@@ -4843,7 +4839,7 @@
               </a:rPr>
               <a:t>About Me</a:t>
             </a:r>
-            <a:endParaRPr lang="en-US" sz="2400" dirty="0"/>
+            <a:endParaRPr lang="en-US" sz="2400"/>
           </a:p>
         </p:txBody>
       </p:sp>
@@ -4872,7 +4868,7 @@
               <a:buNone/>
             </a:pPr>
             <a:r>
-              <a:rPr lang="en-US" sz="1200" i="1" dirty="0">
+              <a:rPr lang="en-US" sz="1200" i="1">
                 <a:solidFill>
                   <a:srgbClr val="A8D4E8"/>
                 </a:solidFill>
@@ -4882,7 +4878,7 @@
               </a:rPr>
               <a:t>Background &amp; why this project matters personally</a:t>
             </a:r>
-            <a:endParaRPr lang="en-US" sz="1200" dirty="0"/>
+            <a:endParaRPr lang="en-US" sz="1200"/>
           </a:p>
         </p:txBody>
       </p:sp>
@@ -4936,7 +4932,7 @@
               <a:buNone/>
             </a:pPr>
             <a:r>
-              <a:rPr lang="en-US" sz="900" dirty="0">
+              <a:rPr lang="en-US" sz="900">
                 <a:solidFill>
                   <a:srgbClr val="64748B"/>
                 </a:solidFill>
@@ -4946,7 +4942,7 @@
               </a:rPr>
               <a:t>Kevin Sayavong  |  Data Analytics Capstone  |  LendingClub Loan Default Analysis</a:t>
             </a:r>
-            <a:endParaRPr lang="en-US" sz="900" dirty="0"/>
+            <a:endParaRPr lang="en-US" sz="900"/>
           </a:p>
         </p:txBody>
       </p:sp>
@@ -5007,7 +5003,7 @@
               <a:buNone/>
             </a:pPr>
             <a:r>
-              <a:rPr lang="en-US" sz="1800" b="1" dirty="0">
+              <a:rPr lang="en-US" sz="1800" b="1">
                 <a:solidFill>
                   <a:srgbClr val="FFFFFF"/>
                 </a:solidFill>
@@ -5017,7 +5013,7 @@
               </a:rPr>
               <a:t>Kevin Sayavong</a:t>
             </a:r>
-            <a:endParaRPr lang="en-US" sz="1800" dirty="0"/>
+            <a:endParaRPr lang="en-US" sz="1800"/>
           </a:p>
         </p:txBody>
       </p:sp>
@@ -5046,7 +5042,7 @@
               <a:buNone/>
             </a:pPr>
             <a:r>
-              <a:rPr lang="en-US" sz="1200" i="1" dirty="0">
+              <a:rPr lang="en-US" sz="1200" i="1">
                 <a:solidFill>
                   <a:srgbClr val="A8D4E8"/>
                 </a:solidFill>
@@ -5056,7 +5052,7 @@
               </a:rPr>
               <a:t>Data Analytics Bootcamp  |  Capstone Project</a:t>
             </a:r>
-            <a:endParaRPr lang="en-US" sz="1200" dirty="0"/>
+            <a:endParaRPr lang="en-US" sz="1200"/>
           </a:p>
         </p:txBody>
       </p:sp>
@@ -5110,7 +5106,7 @@
               <a:buNone/>
             </a:pPr>
             <a:r>
-              <a:rPr lang="en-US" sz="1200" b="1" dirty="0">
+              <a:rPr lang="en-US" sz="1200" b="1">
                 <a:solidFill>
                   <a:srgbClr val="A8D4E8"/>
                 </a:solidFill>
@@ -5121,7 +5117,7 @@
               <a:t>Role:  </a:t>
             </a:r>
             <a:r>
-              <a:rPr lang="en-US" sz="1200" dirty="0">
+              <a:rPr lang="en-US" sz="1200">
                 <a:solidFill>
                   <a:srgbClr val="FFFFFF"/>
                 </a:solidFill>
@@ -5131,7 +5127,7 @@
               </a:rPr>
               <a:t>Developer — Master Data Management Dept.</a:t>
             </a:r>
-            <a:endParaRPr lang="en-US" sz="1200" dirty="0"/>
+            <a:endParaRPr lang="en-US" sz="1200"/>
           </a:p>
         </p:txBody>
       </p:sp>
@@ -5185,7 +5181,7 @@
               <a:buNone/>
             </a:pPr>
             <a:r>
-              <a:rPr lang="en-US" sz="1200" b="1" dirty="0">
+              <a:rPr lang="en-US" sz="1200" b="1">
                 <a:solidFill>
                   <a:srgbClr val="A8D4E8"/>
                 </a:solidFill>
@@ -5196,7 +5192,7 @@
               <a:t>Company:  </a:t>
             </a:r>
             <a:r>
-              <a:rPr lang="en-US" sz="1200" dirty="0">
+              <a:rPr lang="en-US" sz="1200">
                 <a:solidFill>
                   <a:srgbClr val="FFFFFF"/>
                 </a:solidFill>
@@ -5206,7 +5202,7 @@
               </a:rPr>
               <a:t>Northwestern Mutual Life Insurance</a:t>
             </a:r>
-            <a:endParaRPr lang="en-US" sz="1200" dirty="0"/>
+            <a:endParaRPr lang="en-US" sz="1200"/>
           </a:p>
         </p:txBody>
       </p:sp>
@@ -5260,7 +5256,7 @@
               <a:buNone/>
             </a:pPr>
             <a:r>
-              <a:rPr lang="en-US" sz="1200" b="1" dirty="0">
+              <a:rPr lang="en-US" sz="1200" b="1">
                 <a:solidFill>
                   <a:srgbClr val="A8D4E8"/>
                 </a:solidFill>
@@ -5271,7 +5267,7 @@
               <a:t>Focus:  </a:t>
             </a:r>
             <a:r>
-              <a:rPr lang="en-US" sz="1200" dirty="0">
+              <a:rPr lang="en-US" sz="1200">
                 <a:solidFill>
                   <a:srgbClr val="FFFFFF"/>
                 </a:solidFill>
@@ -5281,7 +5277,7 @@
               </a:rPr>
               <a:t>Data integrity, validation pipelines, and reliable data systems that power financial risk models</a:t>
             </a:r>
-            <a:endParaRPr lang="en-US" sz="1200" dirty="0"/>
+            <a:endParaRPr lang="en-US" sz="1200"/>
           </a:p>
         </p:txBody>
       </p:sp>
@@ -5342,7 +5338,7 @@
               <a:buNone/>
             </a:pPr>
             <a:r>
-              <a:rPr lang="en-US" sz="1500" b="1" dirty="0">
+              <a:rPr lang="en-US" sz="1500" b="1">
                 <a:solidFill>
                   <a:srgbClr val="8B5E00"/>
                 </a:solidFill>
@@ -5352,7 +5348,7 @@
               </a:rPr>
               <a:t>Why This Project?</a:t>
             </a:r>
-            <a:endParaRPr lang="en-US" sz="1500" dirty="0"/>
+            <a:endParaRPr lang="en-US" sz="1500"/>
           </a:p>
         </p:txBody>
       </p:sp>
@@ -5406,7 +5402,7 @@
               <a:buNone/>
             </a:pPr>
             <a:r>
-              <a:rPr lang="en-US" sz="1100" dirty="0">
+              <a:rPr lang="en-US" sz="1100">
                 <a:solidFill>
                   <a:srgbClr val="2D3748"/>
                 </a:solidFill>
@@ -5416,7 +5412,7 @@
               </a:rPr>
               <a:t>At Northwestern Mutual, clean and reliable Master Data is the foundation of every risk decision the company makes.</a:t>
             </a:r>
-            <a:endParaRPr lang="en-US" sz="1100" dirty="0"/>
+            <a:endParaRPr lang="en-US" sz="1100"/>
           </a:p>
         </p:txBody>
       </p:sp>
@@ -5470,7 +5466,7 @@
               <a:buNone/>
             </a:pPr>
             <a:r>
-              <a:rPr lang="en-US" sz="1100" dirty="0">
+              <a:rPr lang="en-US" sz="1100">
                 <a:solidFill>
                   <a:srgbClr val="2D3748"/>
                 </a:solidFill>
@@ -5480,7 +5476,7 @@
               </a:rPr>
               <a:t>This project directly mirrors that work — raw financial data must be validated, transformed, and engineered before any meaningful analysis can begin.</a:t>
             </a:r>
-            <a:endParaRPr lang="en-US" sz="1100" dirty="0"/>
+            <a:endParaRPr lang="en-US" sz="1100"/>
           </a:p>
         </p:txBody>
       </p:sp>
@@ -5534,7 +5530,7 @@
               <a:buNone/>
             </a:pPr>
             <a:r>
-              <a:rPr lang="en-US" sz="1100" dirty="0">
+              <a:rPr lang="en-US" sz="1100">
                 <a:solidFill>
                   <a:srgbClr val="2D3748"/>
                 </a:solidFill>
@@ -5544,7 +5540,7 @@
               </a:rPr>
               <a:t>The question of who will repay a loan is fundamentally a data quality and data engineering problem as much as a data science one.</a:t>
             </a:r>
-            <a:endParaRPr lang="en-US" sz="1100" dirty="0"/>
+            <a:endParaRPr lang="en-US" sz="1100"/>
           </a:p>
         </p:txBody>
       </p:sp>
@@ -5631,7 +5627,7 @@
               <a:buNone/>
             </a:pPr>
             <a:r>
-              <a:rPr lang="en-US" sz="2400" b="1" dirty="0">
+              <a:rPr lang="en-US" sz="2400" b="1">
                 <a:solidFill>
                   <a:srgbClr val="FFFFFF"/>
                 </a:solidFill>
@@ -5641,7 +5637,7 @@
               </a:rPr>
               <a:t>The Business Problem</a:t>
             </a:r>
-            <a:endParaRPr lang="en-US" sz="2400" dirty="0"/>
+            <a:endParaRPr lang="en-US" sz="2400"/>
           </a:p>
         </p:txBody>
       </p:sp>
@@ -5670,7 +5666,7 @@
               <a:buNone/>
             </a:pPr>
             <a:r>
-              <a:rPr lang="en-US" sz="1200" i="1" dirty="0">
+              <a:rPr lang="en-US" sz="1200" i="1">
                 <a:solidFill>
                   <a:srgbClr val="A8D4E8"/>
                 </a:solidFill>
@@ -5680,7 +5676,7 @@
               </a:rPr>
               <a:t>Why does predicting loan default matter?</a:t>
             </a:r>
-            <a:endParaRPr lang="en-US" sz="1200" dirty="0"/>
+            <a:endParaRPr lang="en-US" sz="1200"/>
           </a:p>
         </p:txBody>
       </p:sp>
@@ -5734,7 +5730,7 @@
               <a:buNone/>
             </a:pPr>
             <a:r>
-              <a:rPr lang="en-US" sz="900" dirty="0">
+              <a:rPr lang="en-US" sz="900">
                 <a:solidFill>
                   <a:srgbClr val="64748B"/>
                 </a:solidFill>
@@ -5744,7 +5740,7 @@
               </a:rPr>
               <a:t>Kevin Sayavong  |  Data Analytics Capstone  |  LendingClub Loan Default Analysis</a:t>
             </a:r>
-            <a:endParaRPr lang="en-US" sz="900" dirty="0"/>
+            <a:endParaRPr lang="en-US" sz="900"/>
           </a:p>
         </p:txBody>
       </p:sp>
@@ -5773,7 +5769,7 @@
               <a:buNone/>
             </a:pPr>
             <a:r>
-              <a:rPr lang="en-US" sz="1400" b="1" dirty="0">
+              <a:rPr lang="en-US" sz="1400" b="1">
                 <a:solidFill>
                   <a:srgbClr val="065A82"/>
                 </a:solidFill>
@@ -5784,7 +5780,7 @@
               <a:t>LendingClub </a:t>
             </a:r>
             <a:r>
-              <a:rPr lang="en-US" sz="1400" dirty="0">
+              <a:rPr lang="en-US" sz="1400">
                 <a:solidFill>
                   <a:srgbClr val="2D3748"/>
                 </a:solidFill>
@@ -5794,7 +5790,7 @@
               </a:rPr>
               <a:t>must decide who to lend money to before knowing if that person will pay it back.</a:t>
             </a:r>
-            <a:endParaRPr lang="en-US" sz="1400" dirty="0"/>
+            <a:endParaRPr lang="en-US" sz="1400"/>
           </a:p>
         </p:txBody>
       </p:sp>
@@ -5848,7 +5844,7 @@
               <a:buNone/>
             </a:pPr>
             <a:r>
-              <a:rPr lang="en-US" sz="1300" b="1" dirty="0">
+              <a:rPr lang="en-US" sz="1300" b="1">
                 <a:solidFill>
                   <a:srgbClr val="B85042"/>
                 </a:solidFill>
@@ -5859,7 +5855,7 @@
               <a:t>Approve a risky loan →</a:t>
             </a:r>
             <a:r>
-              <a:rPr lang="en-US" sz="1300" dirty="0">
+              <a:rPr lang="en-US" sz="1300">
                 <a:solidFill>
                   <a:srgbClr val="2D3748"/>
                 </a:solidFill>
@@ -5869,7 +5865,7 @@
               </a:rPr>
               <a:t>  borrower defaults, lender loses money</a:t>
             </a:r>
-            <a:endParaRPr lang="en-US" sz="1300" dirty="0"/>
+            <a:endParaRPr lang="en-US" sz="1300"/>
           </a:p>
         </p:txBody>
       </p:sp>
@@ -5923,7 +5919,7 @@
               <a:buNone/>
             </a:pPr>
             <a:r>
-              <a:rPr lang="en-US" sz="1300" b="1" dirty="0">
+              <a:rPr lang="en-US" sz="1300" b="1">
                 <a:solidFill>
                   <a:srgbClr val="B85042"/>
                 </a:solidFill>
@@ -5934,7 +5930,7 @@
               <a:t>Reject a good borrower →</a:t>
             </a:r>
             <a:r>
-              <a:rPr lang="en-US" sz="1300" dirty="0">
+              <a:rPr lang="en-US" sz="1300">
                 <a:solidFill>
                   <a:srgbClr val="2D3748"/>
                 </a:solidFill>
@@ -5944,7 +5940,7 @@
               </a:rPr>
               <a:t>  lost revenue + harm to the applicant</a:t>
             </a:r>
-            <a:endParaRPr lang="en-US" sz="1300" dirty="0"/>
+            <a:endParaRPr lang="en-US" sz="1300"/>
           </a:p>
         </p:txBody>
       </p:sp>
@@ -5998,7 +5994,7 @@
               <a:buNone/>
             </a:pPr>
             <a:r>
-              <a:rPr lang="en-US" sz="1300" b="1" dirty="0">
+              <a:rPr lang="en-US" sz="1300" b="1">
                 <a:solidFill>
                   <a:srgbClr val="B85042"/>
                 </a:solidFill>
@@ -6009,7 +6005,7 @@
               <a:t>No screening model →</a:t>
             </a:r>
             <a:r>
-              <a:rPr lang="en-US" sz="1300" dirty="0">
+              <a:rPr lang="en-US" sz="1300">
                 <a:solidFill>
                   <a:srgbClr val="2D3748"/>
                 </a:solidFill>
@@ -6019,7 +6015,7 @@
               </a:rPr>
               <a:t>  both errors happen constantly at scale</a:t>
             </a:r>
-            <a:endParaRPr lang="en-US" sz="1300" dirty="0"/>
+            <a:endParaRPr lang="en-US" sz="1300"/>
           </a:p>
         </p:txBody>
       </p:sp>
@@ -6073,7 +6069,7 @@
               <a:buNone/>
             </a:pPr>
             <a:r>
-              <a:rPr lang="en-US" sz="1100" b="1" kern="0" spc="200" dirty="0">
+              <a:rPr lang="en-US" sz="1100" b="1" kern="0" spc="200">
                 <a:solidFill>
                   <a:srgbClr val="065A82"/>
                 </a:solidFill>
@@ -6083,7 +6079,7 @@
               </a:rPr>
               <a:t>PROJECT GOALS</a:t>
             </a:r>
-            <a:endParaRPr lang="en-US" sz="1100" dirty="0"/>
+            <a:endParaRPr lang="en-US" sz="1100"/>
           </a:p>
         </p:txBody>
       </p:sp>
@@ -6112,7 +6108,7 @@
               <a:buNone/>
             </a:pPr>
             <a:r>
-              <a:rPr lang="en-US" sz="1200" dirty="0">
+              <a:rPr lang="en-US" sz="1200">
                 <a:solidFill>
                   <a:srgbClr val="2D3748"/>
                 </a:solidFill>
@@ -6122,7 +6118,7 @@
               </a:rPr>
               <a:t>1. Data quality validation &amp; cleaning</a:t>
             </a:r>
-            <a:endParaRPr lang="en-US" sz="1200" dirty="0"/>
+            <a:endParaRPr lang="en-US" sz="1200"/>
           </a:p>
         </p:txBody>
       </p:sp>
@@ -6151,7 +6147,7 @@
               <a:buNone/>
             </a:pPr>
             <a:r>
-              <a:rPr lang="en-US" sz="1200" dirty="0">
+              <a:rPr lang="en-US" sz="1200">
                 <a:solidFill>
                   <a:srgbClr val="2D3748"/>
                 </a:solidFill>
@@ -6161,7 +6157,7 @@
               </a:rPr>
               <a:t>2. Risk factor correlation analysis</a:t>
             </a:r>
-            <a:endParaRPr lang="en-US" sz="1200" dirty="0"/>
+            <a:endParaRPr lang="en-US" sz="1200"/>
           </a:p>
         </p:txBody>
       </p:sp>
@@ -6190,7 +6186,7 @@
               <a:buNone/>
             </a:pPr>
             <a:r>
-              <a:rPr lang="en-US" sz="1200" dirty="0">
+              <a:rPr lang="en-US" sz="1200">
                 <a:solidFill>
                   <a:srgbClr val="2D3748"/>
                 </a:solidFill>
@@ -6200,7 +6196,7 @@
               </a:rPr>
               <a:t>3. Loan purpose default profiling</a:t>
             </a:r>
-            <a:endParaRPr lang="en-US" sz="1200" dirty="0"/>
+            <a:endParaRPr lang="en-US" sz="1200"/>
           </a:p>
         </p:txBody>
       </p:sp>
@@ -6229,7 +6225,7 @@
               <a:buNone/>
             </a:pPr>
             <a:r>
-              <a:rPr lang="en-US" sz="1200" dirty="0">
+              <a:rPr lang="en-US" sz="1200">
                 <a:solidFill>
                   <a:srgbClr val="2D3748"/>
                 </a:solidFill>
@@ -6239,7 +6235,7 @@
               </a:rPr>
               <a:t>4. Predictive model for default risk</a:t>
             </a:r>
-            <a:endParaRPr lang="en-US" sz="1200" dirty="0"/>
+            <a:endParaRPr lang="en-US" sz="1200"/>
           </a:p>
         </p:txBody>
       </p:sp>
@@ -6268,7 +6264,7 @@
               <a:buNone/>
             </a:pPr>
             <a:r>
-              <a:rPr lang="en-US" sz="1200" dirty="0">
+              <a:rPr lang="en-US" sz="1200">
                 <a:solidFill>
                   <a:srgbClr val="2D3748"/>
                 </a:solidFill>
@@ -6278,7 +6274,7 @@
               </a:rPr>
               <a:t>5. Actionable lending recommendations</a:t>
             </a:r>
-            <a:endParaRPr lang="en-US" sz="1200" dirty="0"/>
+            <a:endParaRPr lang="en-US" sz="1200"/>
           </a:p>
         </p:txBody>
       </p:sp>
@@ -6365,7 +6361,7 @@
               <a:buNone/>
             </a:pPr>
             <a:r>
-              <a:rPr lang="en-US" sz="2400" b="1" dirty="0">
+              <a:rPr lang="en-US" sz="2400" b="1">
                 <a:solidFill>
                   <a:srgbClr val="FFFFFF"/>
                 </a:solidFill>
@@ -6375,7 +6371,7 @@
               </a:rPr>
               <a:t>The Dataset</a:t>
             </a:r>
-            <a:endParaRPr lang="en-US" sz="2400" dirty="0"/>
+            <a:endParaRPr lang="en-US" sz="2400"/>
           </a:p>
         </p:txBody>
       </p:sp>
@@ -6404,7 +6400,7 @@
               <a:buNone/>
             </a:pPr>
             <a:r>
-              <a:rPr lang="en-US" sz="1200" i="1" dirty="0">
+              <a:rPr lang="en-US" sz="1200" i="1">
                 <a:solidFill>
                   <a:srgbClr val="A8D4E8"/>
                 </a:solidFill>
@@ -6414,7 +6410,7 @@
               </a:rPr>
               <a:t>LendingClub Loan Data — Kaggle Imbalance Dataset</a:t>
             </a:r>
-            <a:endParaRPr lang="en-US" sz="1200" dirty="0"/>
+            <a:endParaRPr lang="en-US" sz="1200"/>
           </a:p>
         </p:txBody>
       </p:sp>
@@ -6468,7 +6464,7 @@
               <a:buNone/>
             </a:pPr>
             <a:r>
-              <a:rPr lang="en-US" sz="900" dirty="0">
+              <a:rPr lang="en-US" sz="900">
                 <a:solidFill>
                   <a:srgbClr val="64748B"/>
                 </a:solidFill>
@@ -6478,7 +6474,7 @@
               </a:rPr>
               <a:t>Kevin Sayavong  |  Data Analytics Capstone  |  LendingClub Loan Default Analysis</a:t>
             </a:r>
-            <a:endParaRPr lang="en-US" sz="900" dirty="0"/>
+            <a:endParaRPr lang="en-US" sz="900"/>
           </a:p>
         </p:txBody>
       </p:sp>
@@ -6534,7 +6530,7 @@
               <a:buNone/>
             </a:pPr>
             <a:r>
-              <a:rPr lang="en-US" sz="2600" b="1" dirty="0">
+              <a:rPr lang="en-US" sz="2600" b="1">
                 <a:solidFill>
                   <a:srgbClr val="FFFFFF"/>
                 </a:solidFill>
@@ -6544,7 +6540,7 @@
               </a:rPr>
               <a:t>9,578</a:t>
             </a:r>
-            <a:endParaRPr lang="en-US" sz="2600" dirty="0"/>
+            <a:endParaRPr lang="en-US" sz="2600"/>
           </a:p>
         </p:txBody>
       </p:sp>
@@ -6573,7 +6569,7 @@
               <a:buNone/>
             </a:pPr>
             <a:r>
-              <a:rPr lang="en-US" sz="1000" dirty="0">
+              <a:rPr lang="en-US" sz="1000">
                 <a:solidFill>
                   <a:srgbClr val="CCE8F4"/>
                 </a:solidFill>
@@ -6583,7 +6579,7 @@
               </a:rPr>
               <a:t>Total Loan Records</a:t>
             </a:r>
-            <a:endParaRPr lang="en-US" sz="1000" dirty="0"/>
+            <a:endParaRPr lang="en-US" sz="1000"/>
           </a:p>
         </p:txBody>
       </p:sp>
@@ -6639,7 +6635,7 @@
               <a:buNone/>
             </a:pPr>
             <a:r>
-              <a:rPr lang="en-US" sz="2600" b="1" dirty="0">
+              <a:rPr lang="en-US" sz="2600" b="1">
                 <a:solidFill>
                   <a:srgbClr val="FFFFFF"/>
                 </a:solidFill>
@@ -6649,7 +6645,7 @@
               </a:rPr>
               <a:t>22</a:t>
             </a:r>
-            <a:endParaRPr lang="en-US" sz="2600" dirty="0"/>
+            <a:endParaRPr lang="en-US" sz="2600"/>
           </a:p>
         </p:txBody>
       </p:sp>
@@ -6671,24 +6667,28 @@
           <a:ln/>
         </p:spPr>
         <p:txBody>
-          <a:bodyPr wrap="square" rtlCol="0" anchor="t"/>
+          <a:bodyPr wrap="square" lIns="91440" tIns="45720" rIns="91440" bIns="45720" rtlCol="0" anchor="t"/>
           <a:lstStyle/>
           <a:p>
             <a:pPr marL="0" indent="0" algn="ctr">
               <a:buNone/>
             </a:pPr>
             <a:r>
-              <a:rPr lang="en-US" sz="1000" dirty="0">
+              <a:rPr lang="en-US" sz="1000">
                 <a:solidFill>
                   <a:srgbClr val="CCE8F4"/>
                 </a:solidFill>
-                <a:latin typeface="Calibri" pitchFamily="34" charset="0"/>
-                <a:ea typeface="Calibri" pitchFamily="34" charset="-122"/>
-                <a:cs typeface="Calibri" pitchFamily="34" charset="-120"/>
-              </a:rPr>
-              <a:t>Variables (after engineering)</a:t>
-            </a:r>
-            <a:endParaRPr lang="en-US" sz="1000" dirty="0"/>
+                <a:latin typeface="Calibri"/>
+                <a:ea typeface="Calibri"/>
+                <a:cs typeface="Calibri"/>
+              </a:rPr>
+              <a:t>Variables </a:t>
+            </a:r>
+            <a:endParaRPr lang="en-US" sz="1000">
+              <a:latin typeface="Calibri"/>
+              <a:ea typeface="Calibri"/>
+              <a:cs typeface="Calibri"/>
+            </a:endParaRPr>
           </a:p>
         </p:txBody>
       </p:sp>
@@ -6744,7 +6744,7 @@
               <a:buNone/>
             </a:pPr>
             <a:r>
-              <a:rPr lang="en-US" sz="2600" b="1" dirty="0">
+              <a:rPr lang="en-US" sz="2600" b="1">
                 <a:solidFill>
                   <a:srgbClr val="FFFFFF"/>
                 </a:solidFill>
@@ -6754,7 +6754,7 @@
               </a:rPr>
               <a:t>0</a:t>
             </a:r>
-            <a:endParaRPr lang="en-US" sz="2600" dirty="0"/>
+            <a:endParaRPr lang="en-US" sz="2600"/>
           </a:p>
         </p:txBody>
       </p:sp>
@@ -6783,7 +6783,7 @@
               <a:buNone/>
             </a:pPr>
             <a:r>
-              <a:rPr lang="en-US" sz="1000" dirty="0">
+              <a:rPr lang="en-US" sz="1000">
                 <a:solidFill>
                   <a:srgbClr val="CCE8F4"/>
                 </a:solidFill>
@@ -6793,7 +6793,7 @@
               </a:rPr>
               <a:t>Missing Values</a:t>
             </a:r>
-            <a:endParaRPr lang="en-US" sz="1000" dirty="0"/>
+            <a:endParaRPr lang="en-US" sz="1000"/>
           </a:p>
         </p:txBody>
       </p:sp>
@@ -6849,7 +6849,7 @@
               <a:buNone/>
             </a:pPr>
             <a:r>
-              <a:rPr lang="en-US" sz="2600" b="1" dirty="0">
+              <a:rPr lang="en-US" sz="2600" b="1">
                 <a:solidFill>
                   <a:srgbClr val="FFFFFF"/>
                 </a:solidFill>
@@ -6859,7 +6859,7 @@
               </a:rPr>
               <a:t>16%</a:t>
             </a:r>
-            <a:endParaRPr lang="en-US" sz="2600" dirty="0"/>
+            <a:endParaRPr lang="en-US" sz="2600"/>
           </a:p>
         </p:txBody>
       </p:sp>
@@ -6888,7 +6888,7 @@
               <a:buNone/>
             </a:pPr>
             <a:r>
-              <a:rPr lang="en-US" sz="1000" dirty="0">
+              <a:rPr lang="en-US" sz="1000">
                 <a:solidFill>
                   <a:srgbClr val="CCE8F4"/>
                 </a:solidFill>
@@ -6898,7 +6898,7 @@
               </a:rPr>
               <a:t>Overall Default Rate</a:t>
             </a:r>
-            <a:endParaRPr lang="en-US" sz="1000" dirty="0"/>
+            <a:endParaRPr lang="en-US" sz="1000"/>
           </a:p>
         </p:txBody>
       </p:sp>
@@ -6927,7 +6927,7 @@
               <a:buNone/>
             </a:pPr>
             <a:r>
-              <a:rPr lang="en-US" sz="1300" b="1" dirty="0">
+              <a:rPr lang="en-US" sz="1300" b="1">
                 <a:solidFill>
                   <a:srgbClr val="065A82"/>
                 </a:solidFill>
@@ -6937,7 +6937,7 @@
               </a:rPr>
               <a:t>Key Variables</a:t>
             </a:r>
-            <a:endParaRPr lang="en-US" sz="1300" dirty="0"/>
+            <a:endParaRPr lang="en-US" sz="1300"/>
           </a:p>
         </p:txBody>
       </p:sp>
@@ -6991,7 +6991,7 @@
               <a:buNone/>
             </a:pPr>
             <a:r>
-              <a:rPr lang="en-US" sz="1100" b="1" dirty="0">
+              <a:rPr lang="en-US" sz="1100" b="1">
                 <a:solidFill>
                   <a:srgbClr val="FFFFFF"/>
                 </a:solidFill>
@@ -7001,7 +7001,7 @@
               </a:rPr>
               <a:t>Variable</a:t>
             </a:r>
-            <a:endParaRPr lang="en-US" sz="1100" dirty="0"/>
+            <a:endParaRPr lang="en-US" sz="1100"/>
           </a:p>
         </p:txBody>
       </p:sp>
@@ -7055,7 +7055,7 @@
               <a:buNone/>
             </a:pPr>
             <a:r>
-              <a:rPr lang="en-US" sz="1100" b="1" dirty="0">
+              <a:rPr lang="en-US" sz="1100" b="1">
                 <a:solidFill>
                   <a:srgbClr val="FFFFFF"/>
                 </a:solidFill>
@@ -7065,7 +7065,7 @@
               </a:rPr>
               <a:t>Description</a:t>
             </a:r>
-            <a:endParaRPr lang="en-US" sz="1100" dirty="0"/>
+            <a:endParaRPr lang="en-US" sz="1100"/>
           </a:p>
         </p:txBody>
       </p:sp>
@@ -7119,7 +7119,7 @@
               <a:buNone/>
             </a:pPr>
             <a:r>
-              <a:rPr lang="en-US" sz="1100" dirty="0">
+              <a:rPr lang="en-US" sz="1100">
                 <a:solidFill>
                   <a:srgbClr val="2D3748"/>
                 </a:solidFill>
@@ -7129,7 +7129,7 @@
               </a:rPr>
               <a:t>FICO Score</a:t>
             </a:r>
-            <a:endParaRPr lang="en-US" sz="1100" dirty="0"/>
+            <a:endParaRPr lang="en-US" sz="1100"/>
           </a:p>
         </p:txBody>
       </p:sp>
@@ -7183,7 +7183,7 @@
               <a:buNone/>
             </a:pPr>
             <a:r>
-              <a:rPr lang="en-US" sz="1100" dirty="0">
+              <a:rPr lang="en-US" sz="1100">
                 <a:solidFill>
                   <a:srgbClr val="2D3748"/>
                 </a:solidFill>
@@ -7193,7 +7193,7 @@
               </a:rPr>
               <a:t>Borrower credit score (612–827)</a:t>
             </a:r>
-            <a:endParaRPr lang="en-US" sz="1100" dirty="0"/>
+            <a:endParaRPr lang="en-US" sz="1100"/>
           </a:p>
         </p:txBody>
       </p:sp>
@@ -7247,7 +7247,7 @@
               <a:buNone/>
             </a:pPr>
             <a:r>
-              <a:rPr lang="en-US" sz="1100" dirty="0">
+              <a:rPr lang="en-US" sz="1100">
                 <a:solidFill>
                   <a:srgbClr val="2D3748"/>
                 </a:solidFill>
@@ -7257,7 +7257,7 @@
               </a:rPr>
               <a:t>Interest Rate</a:t>
             </a:r>
-            <a:endParaRPr lang="en-US" sz="1100" dirty="0"/>
+            <a:endParaRPr lang="en-US" sz="1100"/>
           </a:p>
         </p:txBody>
       </p:sp>
@@ -7311,7 +7311,7 @@
               <a:buNone/>
             </a:pPr>
             <a:r>
-              <a:rPr lang="en-US" sz="1100" dirty="0">
+              <a:rPr lang="en-US" sz="1100">
                 <a:solidFill>
                   <a:srgbClr val="2D3748"/>
                 </a:solidFill>
@@ -7321,7 +7321,7 @@
               </a:rPr>
               <a:t>Rate assigned by LendingClub</a:t>
             </a:r>
-            <a:endParaRPr lang="en-US" sz="1100" dirty="0"/>
+            <a:endParaRPr lang="en-US" sz="1100"/>
           </a:p>
         </p:txBody>
       </p:sp>
@@ -7451,17 +7451,6 @@
               </a:rPr>
               <a:t>Payment ÷ Monthly income</a:t>
             </a:r>
-            <a:endParaRPr lang="en-US" sz="1100" dirty="0">
-              <a:solidFill>
-                <a:schemeClr val="tx1">
-                  <a:lumMod val="85000"/>
-                  <a:lumOff val="15000"/>
-                </a:schemeClr>
-              </a:solidFill>
-              <a:latin typeface="Calibri"/>
-              <a:ea typeface="Calibri"/>
-              <a:cs typeface="Calibri"/>
-            </a:endParaRPr>
           </a:p>
         </p:txBody>
       </p:sp>
@@ -7515,7 +7504,7 @@
               <a:buNone/>
             </a:pPr>
             <a:r>
-              <a:rPr lang="en-US" sz="1100" dirty="0">
+              <a:rPr lang="en-US" sz="1100">
                 <a:solidFill>
                   <a:srgbClr val="2D3748"/>
                 </a:solidFill>
@@ -7525,7 +7514,7 @@
               </a:rPr>
               <a:t>Debt-to-Income Ratio</a:t>
             </a:r>
-            <a:endParaRPr lang="en-US" sz="1100" dirty="0"/>
+            <a:endParaRPr lang="en-US" sz="1100"/>
           </a:p>
         </p:txBody>
       </p:sp>
@@ -7579,7 +7568,7 @@
               <a:buNone/>
             </a:pPr>
             <a:r>
-              <a:rPr lang="en-US" sz="1100" dirty="0">
+              <a:rPr lang="en-US" sz="1100">
                 <a:solidFill>
                   <a:srgbClr val="2D3748"/>
                 </a:solidFill>
@@ -7589,7 +7578,7 @@
               </a:rPr>
               <a:t>Existing debt vs. income</a:t>
             </a:r>
-            <a:endParaRPr lang="en-US" sz="1100" dirty="0"/>
+            <a:endParaRPr lang="en-US" sz="1100"/>
           </a:p>
         </p:txBody>
       </p:sp>
@@ -7643,7 +7632,7 @@
               <a:buNone/>
             </a:pPr>
             <a:r>
-              <a:rPr lang="en-US" sz="1100" dirty="0">
+              <a:rPr lang="en-US" sz="1100">
                 <a:solidFill>
                   <a:srgbClr val="2D3748"/>
                 </a:solidFill>
@@ -7653,7 +7642,7 @@
               </a:rPr>
               <a:t>Loan Purpose</a:t>
             </a:r>
-            <a:endParaRPr lang="en-US" sz="1100" dirty="0"/>
+            <a:endParaRPr lang="en-US" sz="1100"/>
           </a:p>
         </p:txBody>
       </p:sp>
@@ -7707,7 +7696,7 @@
               <a:buNone/>
             </a:pPr>
             <a:r>
-              <a:rPr lang="en-US" sz="1100" dirty="0">
+              <a:rPr lang="en-US" sz="1100">
                 <a:solidFill>
                   <a:srgbClr val="2D3748"/>
                 </a:solidFill>
@@ -7717,7 +7706,7 @@
               </a:rPr>
               <a:t>Reason for borrowing (8 categories)</a:t>
             </a:r>
-            <a:endParaRPr lang="en-US" sz="1100" dirty="0"/>
+            <a:endParaRPr lang="en-US" sz="1100"/>
           </a:p>
         </p:txBody>
       </p:sp>
@@ -7774,7 +7763,7 @@
               <a:buNone/>
             </a:pPr>
             <a:r>
-              <a:rPr lang="en-US" sz="1100" dirty="0">
+              <a:rPr lang="en-US" sz="1100">
                 <a:solidFill>
                   <a:srgbClr val="2D3748"/>
                 </a:solidFill>
@@ -7784,7 +7773,7 @@
               </a:rPr>
               <a:t>Not Fully Paid</a:t>
             </a:r>
-            <a:endParaRPr lang="en-US" sz="1100" dirty="0"/>
+            <a:endParaRPr lang="en-US" sz="1100"/>
           </a:p>
         </p:txBody>
       </p:sp>
@@ -7884,7 +7873,7 @@
               <a:buNone/>
             </a:pPr>
             <a:r>
-              <a:rPr lang="en-US" sz="1000" i="1" dirty="0">
+              <a:rPr lang="en-US" sz="1000" i="1">
                 <a:solidFill>
                   <a:srgbClr val="8B5E00"/>
                 </a:solidFill>
@@ -7894,7 +7883,7 @@
               </a:rPr>
               <a:t>* = not in original dataset — engineered for this analysis</a:t>
             </a:r>
-            <a:endParaRPr lang="en-US" sz="1000" dirty="0"/>
+            <a:endParaRPr lang="en-US" sz="1000"/>
           </a:p>
         </p:txBody>
       </p:sp>
@@ -7981,7 +7970,7 @@
               <a:buNone/>
             </a:pPr>
             <a:r>
-              <a:rPr lang="en-US" sz="2400" b="1" dirty="0">
+              <a:rPr lang="en-US" sz="2400" b="1">
                 <a:solidFill>
                   <a:srgbClr val="FFFFFF"/>
                 </a:solidFill>
@@ -7991,7 +7980,7 @@
               </a:rPr>
               <a:t>Data Cleaning &amp; Feature Engineering</a:t>
             </a:r>
-            <a:endParaRPr lang="en-US" sz="2400" dirty="0"/>
+            <a:endParaRPr lang="en-US" sz="2400"/>
           </a:p>
         </p:txBody>
       </p:sp>
@@ -8020,7 +8009,7 @@
               <a:buNone/>
             </a:pPr>
             <a:r>
-              <a:rPr lang="en-US" sz="1200" i="1" dirty="0">
+              <a:rPr lang="en-US" sz="1200" i="1">
                 <a:solidFill>
                   <a:srgbClr val="A8D4E8"/>
                 </a:solidFill>
@@ -8030,7 +8019,7 @@
               </a:rPr>
               <a:t>Turning raw CSV into analysis-ready data</a:t>
             </a:r>
-            <a:endParaRPr lang="en-US" sz="1200" dirty="0"/>
+            <a:endParaRPr lang="en-US" sz="1200"/>
           </a:p>
         </p:txBody>
       </p:sp>
@@ -8084,7 +8073,7 @@
               <a:buNone/>
             </a:pPr>
             <a:r>
-              <a:rPr lang="en-US" sz="900" dirty="0">
+              <a:rPr lang="en-US" sz="900">
                 <a:solidFill>
                   <a:srgbClr val="64748B"/>
                 </a:solidFill>
@@ -8094,7 +8083,7 @@
               </a:rPr>
               <a:t>Kevin Sayavong  |  Data Analytics Capstone  |  LendingClub Loan Default Analysis</a:t>
             </a:r>
-            <a:endParaRPr lang="en-US" sz="900" dirty="0"/>
+            <a:endParaRPr lang="en-US" sz="900"/>
           </a:p>
         </p:txBody>
       </p:sp>
@@ -8123,7 +8112,7 @@
               <a:buNone/>
             </a:pPr>
             <a:r>
-              <a:rPr lang="en-US" sz="1100" b="1" kern="0" spc="200" dirty="0">
+              <a:rPr lang="en-US" sz="1100" b="1" kern="0" spc="200">
                 <a:solidFill>
                   <a:srgbClr val="065A82"/>
                 </a:solidFill>
@@ -8133,7 +8122,7 @@
               </a:rPr>
               <a:t>CLEANING STEPS</a:t>
             </a:r>
-            <a:endParaRPr lang="en-US" sz="1100" dirty="0"/>
+            <a:endParaRPr lang="en-US" sz="1100"/>
           </a:p>
         </p:txBody>
       </p:sp>
@@ -8187,7 +8176,7 @@
               <a:buNone/>
             </a:pPr>
             <a:r>
-              <a:rPr lang="en-US" sz="1200" b="1" dirty="0">
+              <a:rPr lang="en-US" sz="1200" b="1">
                 <a:solidFill>
                   <a:srgbClr val="FFFFFF"/>
                 </a:solidFill>
@@ -8197,7 +8186,7 @@
               </a:rPr>
               <a:t>1</a:t>
             </a:r>
-            <a:endParaRPr lang="en-US" sz="1200" dirty="0"/>
+            <a:endParaRPr lang="en-US" sz="1200"/>
           </a:p>
         </p:txBody>
       </p:sp>
@@ -8226,7 +8215,7 @@
               <a:buNone/>
             </a:pPr>
             <a:r>
-              <a:rPr lang="en-US" sz="1200" b="1" dirty="0">
+              <a:rPr lang="en-US" sz="1200" b="1">
                 <a:solidFill>
                   <a:srgbClr val="065A82"/>
                 </a:solidFill>
@@ -8236,7 +8225,7 @@
               </a:rPr>
               <a:t>Symbol Removal</a:t>
             </a:r>
-            <a:endParaRPr lang="en-US" sz="1200" dirty="0"/>
+            <a:endParaRPr lang="en-US" sz="1200"/>
           </a:p>
         </p:txBody>
       </p:sp>
@@ -8265,7 +8254,7 @@
               <a:buNone/>
             </a:pPr>
             <a:r>
-              <a:rPr lang="en-US" sz="1100" dirty="0">
+              <a:rPr lang="en-US" sz="1100">
                 <a:solidFill>
                   <a:srgbClr val="64748B"/>
                 </a:solidFill>
@@ -8275,7 +8264,7 @@
               </a:rPr>
               <a:t>Stripped $ and commas from Installments column</a:t>
             </a:r>
-            <a:endParaRPr lang="en-US" sz="1100" dirty="0"/>
+            <a:endParaRPr lang="en-US" sz="1100"/>
           </a:p>
         </p:txBody>
       </p:sp>
@@ -8329,7 +8318,7 @@
               <a:buNone/>
             </a:pPr>
             <a:r>
-              <a:rPr lang="en-US" sz="1200" b="1" dirty="0">
+              <a:rPr lang="en-US" sz="1200" b="1">
                 <a:solidFill>
                   <a:srgbClr val="FFFFFF"/>
                 </a:solidFill>
@@ -8339,7 +8328,7 @@
               </a:rPr>
               <a:t>2</a:t>
             </a:r>
-            <a:endParaRPr lang="en-US" sz="1200" dirty="0"/>
+            <a:endParaRPr lang="en-US" sz="1200"/>
           </a:p>
         </p:txBody>
       </p:sp>
@@ -8368,7 +8357,7 @@
               <a:buNone/>
             </a:pPr>
             <a:r>
-              <a:rPr lang="en-US" sz="1200" b="1" dirty="0">
+              <a:rPr lang="en-US" sz="1200" b="1">
                 <a:solidFill>
                   <a:srgbClr val="065A82"/>
                 </a:solidFill>
@@ -8378,7 +8367,7 @@
               </a:rPr>
               <a:t>Type Conversion</a:t>
             </a:r>
-            <a:endParaRPr lang="en-US" sz="1200" dirty="0"/>
+            <a:endParaRPr lang="en-US" sz="1200"/>
           </a:p>
         </p:txBody>
       </p:sp>
@@ -8407,7 +8396,7 @@
               <a:buNone/>
             </a:pPr>
             <a:r>
-              <a:rPr lang="en-US" sz="1100" dirty="0">
+              <a:rPr lang="en-US" sz="1100">
                 <a:solidFill>
                   <a:srgbClr val="64748B"/>
                 </a:solidFill>
@@ -8417,7 +8406,7 @@
               </a:rPr>
               <a:t>All numeric fields: text → float using pd.to_numeric()</a:t>
             </a:r>
-            <a:endParaRPr lang="en-US" sz="1100" dirty="0"/>
+            <a:endParaRPr lang="en-US" sz="1100"/>
           </a:p>
         </p:txBody>
       </p:sp>
@@ -8471,7 +8460,7 @@
               <a:buNone/>
             </a:pPr>
             <a:r>
-              <a:rPr lang="en-US" sz="1200" b="1" dirty="0">
+              <a:rPr lang="en-US" sz="1200" b="1">
                 <a:solidFill>
                   <a:srgbClr val="FFFFFF"/>
                 </a:solidFill>
@@ -8481,7 +8470,7 @@
               </a:rPr>
               <a:t>3</a:t>
             </a:r>
-            <a:endParaRPr lang="en-US" sz="1200" dirty="0"/>
+            <a:endParaRPr lang="en-US" sz="1200"/>
           </a:p>
         </p:txBody>
       </p:sp>
@@ -8510,7 +8499,7 @@
               <a:buNone/>
             </a:pPr>
             <a:r>
-              <a:rPr lang="en-US" sz="1200" b="1" dirty="0">
+              <a:rPr lang="en-US" sz="1200" b="1">
                 <a:solidFill>
                   <a:srgbClr val="065A82"/>
                 </a:solidFill>
@@ -8520,7 +8509,7 @@
               </a:rPr>
               <a:t>Categorical Encoding</a:t>
             </a:r>
-            <a:endParaRPr lang="en-US" sz="1200" dirty="0"/>
+            <a:endParaRPr lang="en-US" sz="1200"/>
           </a:p>
         </p:txBody>
       </p:sp>
@@ -8549,7 +8538,7 @@
               <a:buNone/>
             </a:pPr>
             <a:r>
-              <a:rPr lang="en-US" sz="1100" dirty="0">
+              <a:rPr lang="en-US" sz="1100">
                 <a:solidFill>
                   <a:srgbClr val="64748B"/>
                 </a:solidFill>
@@ -8559,7 +8548,7 @@
               </a:rPr>
               <a:t>"Purpose" → 8 binary columns via one-hot encoding</a:t>
             </a:r>
-            <a:endParaRPr lang="en-US" sz="1100" dirty="0"/>
+            <a:endParaRPr lang="en-US" sz="1100"/>
           </a:p>
         </p:txBody>
       </p:sp>
@@ -8613,7 +8602,7 @@
               <a:buNone/>
             </a:pPr>
             <a:r>
-              <a:rPr lang="en-US" sz="1200" b="1" dirty="0">
+              <a:rPr lang="en-US" sz="1200" b="1">
                 <a:solidFill>
                   <a:srgbClr val="FFFFFF"/>
                 </a:solidFill>
@@ -8623,7 +8612,7 @@
               </a:rPr>
               <a:t>4</a:t>
             </a:r>
-            <a:endParaRPr lang="en-US" sz="1200" dirty="0"/>
+            <a:endParaRPr lang="en-US" sz="1200"/>
           </a:p>
         </p:txBody>
       </p:sp>
@@ -8652,7 +8641,7 @@
               <a:buNone/>
             </a:pPr>
             <a:r>
-              <a:rPr lang="en-US" sz="1200" b="1" dirty="0">
+              <a:rPr lang="en-US" sz="1200" b="1">
                 <a:solidFill>
                   <a:srgbClr val="065A82"/>
                 </a:solidFill>
@@ -8662,7 +8651,7 @@
               </a:rPr>
               <a:t>Rate Standardization</a:t>
             </a:r>
-            <a:endParaRPr lang="en-US" sz="1200" dirty="0"/>
+            <a:endParaRPr lang="en-US" sz="1200"/>
           </a:p>
         </p:txBody>
       </p:sp>
@@ -8691,7 +8680,7 @@
               <a:buNone/>
             </a:pPr>
             <a:r>
-              <a:rPr lang="en-US" sz="1100" dirty="0">
+              <a:rPr lang="en-US" sz="1100">
                 <a:solidFill>
                   <a:srgbClr val="64748B"/>
                 </a:solidFill>
@@ -8701,7 +8690,7 @@
               </a:rPr>
               <a:t>DTI &amp; Revolving Utilization divided by 100 → decimals</a:t>
             </a:r>
-            <a:endParaRPr lang="en-US" sz="1100" dirty="0"/>
+            <a:endParaRPr lang="en-US" sz="1100"/>
           </a:p>
         </p:txBody>
       </p:sp>
@@ -8755,7 +8744,7 @@
               <a:buNone/>
             </a:pPr>
             <a:r>
-              <a:rPr lang="en-US" sz="1200" b="1" dirty="0">
+              <a:rPr lang="en-US" sz="1200" b="1">
                 <a:solidFill>
                   <a:srgbClr val="FFFFFF"/>
                 </a:solidFill>
@@ -8765,7 +8754,7 @@
               </a:rPr>
               <a:t>5</a:t>
             </a:r>
-            <a:endParaRPr lang="en-US" sz="1200" dirty="0"/>
+            <a:endParaRPr lang="en-US" sz="1200"/>
           </a:p>
         </p:txBody>
       </p:sp>
@@ -8794,7 +8783,7 @@
               <a:buNone/>
             </a:pPr>
             <a:r>
-              <a:rPr lang="en-US" sz="1200" b="1" dirty="0">
+              <a:rPr lang="en-US" sz="1200" b="1">
                 <a:solidFill>
                   <a:srgbClr val="065A82"/>
                 </a:solidFill>
@@ -8804,7 +8793,7 @@
               </a:rPr>
               <a:t>Column Removal</a:t>
             </a:r>
-            <a:endParaRPr lang="en-US" sz="1200" dirty="0"/>
+            <a:endParaRPr lang="en-US" sz="1200"/>
           </a:p>
         </p:txBody>
       </p:sp>
@@ -8833,7 +8822,7 @@
               <a:buNone/>
             </a:pPr>
             <a:r>
-              <a:rPr lang="en-US" sz="1100" dirty="0">
+              <a:rPr lang="en-US" sz="1100">
                 <a:solidFill>
                   <a:srgbClr val="64748B"/>
                 </a:solidFill>
@@ -8843,7 +8832,7 @@
               </a:rPr>
               <a:t>Unnamed artifact columns + redundant FICO Bucket removed</a:t>
             </a:r>
-            <a:endParaRPr lang="en-US" sz="1100" dirty="0"/>
+            <a:endParaRPr lang="en-US" sz="1100"/>
           </a:p>
         </p:txBody>
       </p:sp>
@@ -8897,7 +8886,7 @@
               <a:buNone/>
             </a:pPr>
             <a:r>
-              <a:rPr lang="en-US" sz="1400" b="1" dirty="0">
+              <a:rPr lang="en-US" sz="1400" b="1">
                 <a:solidFill>
                   <a:srgbClr val="8B5E00"/>
                 </a:solidFill>
@@ -8907,7 +8896,7 @@
               </a:rPr>
               <a:t>* Feature Engineering</a:t>
             </a:r>
-            <a:endParaRPr lang="en-US" sz="1400" dirty="0"/>
+            <a:endParaRPr lang="en-US" sz="1400"/>
           </a:p>
         </p:txBody>
       </p:sp>
@@ -8936,7 +8925,7 @@
               <a:buNone/>
             </a:pPr>
             <a:r>
-              <a:rPr lang="en-US" sz="1300" b="1" dirty="0">
+              <a:rPr lang="en-US" sz="1300" b="1">
                 <a:solidFill>
                   <a:srgbClr val="065A82"/>
                 </a:solidFill>
@@ -8946,7 +8935,7 @@
               </a:rPr>
               <a:t>Monthly Income</a:t>
             </a:r>
-            <a:endParaRPr lang="en-US" sz="1300" dirty="0"/>
+            <a:endParaRPr lang="en-US" sz="1300"/>
           </a:p>
         </p:txBody>
       </p:sp>
@@ -8975,7 +8964,7 @@
               <a:buNone/>
             </a:pPr>
             <a:r>
-              <a:rPr lang="en-US" sz="1100" dirty="0">
+              <a:rPr lang="en-US" sz="1100">
                 <a:solidFill>
                   <a:srgbClr val="2D3748"/>
                 </a:solidFill>
@@ -8985,20 +8974,20 @@
               </a:rPr>
               <a:t>= exp(Log Annual Income) ÷ 12</a:t>
             </a:r>
-            <a:endParaRPr lang="en-US" sz="1100" dirty="0"/>
-          </a:p>
-          <a:p>
-            <a:pPr marL="0" indent="0">
-              <a:buNone/>
-            </a:pPr>
-            <a:endParaRPr lang="en-US" sz="1100" dirty="0"/>
-          </a:p>
-          <a:p>
-            <a:pPr marL="0" indent="0">
-              <a:buNone/>
-            </a:pPr>
-            <a:r>
-              <a:rPr lang="en-US" sz="1100" dirty="0">
+            <a:endParaRPr lang="en-US" sz="1100"/>
+          </a:p>
+          <a:p>
+            <a:pPr marL="0" indent="0">
+              <a:buNone/>
+            </a:pPr>
+            <a:endParaRPr lang="en-US" sz="1100"/>
+          </a:p>
+          <a:p>
+            <a:pPr marL="0" indent="0">
+              <a:buNone/>
+            </a:pPr>
+            <a:r>
+              <a:rPr lang="en-US" sz="1100">
                 <a:solidFill>
                   <a:srgbClr val="2D3748"/>
                 </a:solidFill>
@@ -9008,7 +8997,7 @@
               </a:rPr>
               <a:t>Converts the mathematically stored log value back into a real monthly dollar figure.</a:t>
             </a:r>
-            <a:endParaRPr lang="en-US" sz="1100" dirty="0"/>
+            <a:endParaRPr lang="en-US" sz="1100"/>
           </a:p>
         </p:txBody>
       </p:sp>
@@ -9060,7 +9049,7 @@
               <a:buNone/>
             </a:pPr>
             <a:r>
-              <a:rPr lang="en-US" sz="1300" b="1" dirty="0">
+              <a:rPr lang="en-US" sz="1300" b="1">
                 <a:solidFill>
                   <a:srgbClr val="B85042"/>
                 </a:solidFill>
@@ -9070,7 +9059,7 @@
               </a:rPr>
               <a:t>Installment as Percent of Income *</a:t>
             </a:r>
-            <a:endParaRPr lang="en-US" sz="1300" dirty="0"/>
+            <a:endParaRPr lang="en-US" sz="1300"/>
           </a:p>
         </p:txBody>
       </p:sp>
@@ -9099,7 +9088,7 @@
               <a:buNone/>
             </a:pPr>
             <a:r>
-              <a:rPr lang="en-US" sz="1100" dirty="0">
+              <a:rPr lang="en-US" sz="1100">
                 <a:solidFill>
                   <a:srgbClr val="2D3748"/>
                 </a:solidFill>
@@ -9109,20 +9098,20 @@
               </a:rPr>
               <a:t>= Installment ÷ Monthly Income</a:t>
             </a:r>
-            <a:endParaRPr lang="en-US" sz="1100" dirty="0"/>
-          </a:p>
-          <a:p>
-            <a:pPr marL="0" indent="0">
-              <a:buNone/>
-            </a:pPr>
-            <a:endParaRPr lang="en-US" sz="1100" dirty="0"/>
-          </a:p>
-          <a:p>
-            <a:pPr marL="0" indent="0">
-              <a:buNone/>
-            </a:pPr>
-            <a:r>
-              <a:rPr lang="en-US" sz="1100" dirty="0">
+            <a:endParaRPr lang="en-US" sz="1100"/>
+          </a:p>
+          <a:p>
+            <a:pPr marL="0" indent="0">
+              <a:buNone/>
+            </a:pPr>
+            <a:endParaRPr lang="en-US" sz="1100"/>
+          </a:p>
+          <a:p>
+            <a:pPr marL="0" indent="0">
+              <a:buNone/>
+            </a:pPr>
+            <a:r>
+              <a:rPr lang="en-US" sz="1100">
                 <a:solidFill>
                   <a:srgbClr val="2D3748"/>
                 </a:solidFill>
@@ -9132,20 +9121,20 @@
               </a:rPr>
               <a:t>Mirrors the real-world "payment-to-income" ratio used in mortgage lending.</a:t>
             </a:r>
-            <a:endParaRPr lang="en-US" sz="1100" dirty="0"/>
-          </a:p>
-          <a:p>
-            <a:pPr marL="0" indent="0">
-              <a:buNone/>
-            </a:pPr>
-            <a:endParaRPr lang="en-US" sz="1100" dirty="0"/>
-          </a:p>
-          <a:p>
-            <a:pPr marL="0" indent="0">
-              <a:buNone/>
-            </a:pPr>
-            <a:r>
-              <a:rPr lang="en-US" sz="1100" dirty="0">
+            <a:endParaRPr lang="en-US" sz="1100"/>
+          </a:p>
+          <a:p>
+            <a:pPr marL="0" indent="0">
+              <a:buNone/>
+            </a:pPr>
+            <a:endParaRPr lang="en-US" sz="1100"/>
+          </a:p>
+          <a:p>
+            <a:pPr marL="0" indent="0">
+              <a:buNone/>
+            </a:pPr>
+            <a:r>
+              <a:rPr lang="en-US" sz="1100">
                 <a:solidFill>
                   <a:srgbClr val="2D3748"/>
                 </a:solidFill>
@@ -9155,7 +9144,7 @@
               </a:rPr>
               <a:t>* Not present in original dataset.</a:t>
             </a:r>
-            <a:endParaRPr lang="en-US" sz="1100" dirty="0"/>
+            <a:endParaRPr lang="en-US" sz="1100"/>
           </a:p>
         </p:txBody>
       </p:sp>
@@ -9242,7 +9231,7 @@
               <a:buNone/>
             </a:pPr>
             <a:r>
-              <a:rPr lang="en-US" sz="2400" b="1" dirty="0">
+              <a:rPr lang="en-US" sz="2400" b="1">
                 <a:solidFill>
                   <a:srgbClr val="FFFFFF"/>
                 </a:solidFill>
@@ -9252,7 +9241,7 @@
               </a:rPr>
               <a:t>Analytical Methodology</a:t>
             </a:r>
-            <a:endParaRPr lang="en-US" sz="2400" dirty="0"/>
+            <a:endParaRPr lang="en-US" sz="2400"/>
           </a:p>
         </p:txBody>
       </p:sp>
@@ -9281,7 +9270,7 @@
               <a:buNone/>
             </a:pPr>
             <a:r>
-              <a:rPr lang="en-US" sz="1200" i="1" dirty="0">
+              <a:rPr lang="en-US" sz="1200" i="1">
                 <a:solidFill>
                   <a:srgbClr val="A8D4E8"/>
                 </a:solidFill>
@@ -9291,7 +9280,7 @@
               </a:rPr>
               <a:t>How we built a fair, reproducible predictive model</a:t>
             </a:r>
-            <a:endParaRPr lang="en-US" sz="1200" dirty="0"/>
+            <a:endParaRPr lang="en-US" sz="1200"/>
           </a:p>
         </p:txBody>
       </p:sp>
@@ -9345,7 +9334,7 @@
               <a:buNone/>
             </a:pPr>
             <a:r>
-              <a:rPr lang="en-US" sz="900" dirty="0">
+              <a:rPr lang="en-US" sz="900">
                 <a:solidFill>
                   <a:srgbClr val="64748B"/>
                 </a:solidFill>
@@ -9355,7 +9344,7 @@
               </a:rPr>
               <a:t>Kevin Sayavong  |  Data Analytics Capstone  |  LendingClub Loan Default Analysis</a:t>
             </a:r>
-            <a:endParaRPr lang="en-US" sz="900" dirty="0"/>
+            <a:endParaRPr lang="en-US" sz="900"/>
           </a:p>
         </p:txBody>
       </p:sp>
@@ -9408,7 +9397,7 @@
               <a:buNone/>
             </a:pPr>
             <a:r>
-              <a:rPr lang="en-US" sz="900" i="1" dirty="0">
+              <a:rPr lang="en-US" sz="900" i="1">
                 <a:solidFill>
                   <a:srgbClr val="64748B"/>
                 </a:solidFill>
@@ -9418,7 +9407,7 @@
               </a:rPr>
               <a:t>Fig 1: Raw class imbalance — 84% paid, 16% defaulted</a:t>
             </a:r>
-            <a:endParaRPr lang="en-US" sz="900" dirty="0"/>
+            <a:endParaRPr lang="en-US" sz="900"/>
           </a:p>
         </p:txBody>
       </p:sp>
@@ -9447,7 +9436,7 @@
               <a:buNone/>
             </a:pPr>
             <a:r>
-              <a:rPr lang="en-US" sz="1100" b="1" kern="0" spc="200" dirty="0">
+              <a:rPr lang="en-US" sz="1100" b="1" kern="0" spc="200">
                 <a:solidFill>
                   <a:srgbClr val="065A82"/>
                 </a:solidFill>
@@ -9457,7 +9446,7 @@
               </a:rPr>
               <a:t>METHODOLOGY DECISIONS</a:t>
             </a:r>
-            <a:endParaRPr lang="en-US" sz="1100" dirty="0"/>
+            <a:endParaRPr lang="en-US" sz="1100"/>
           </a:p>
         </p:txBody>
       </p:sp>
@@ -9494,7 +9483,7 @@
         </p:nvSpPr>
         <p:spPr>
           <a:xfrm>
-            <a:off x="4800600" y="1408176"/>
+            <a:off x="4800600" y="1333633"/>
             <a:ext cx="3977640" cy="256032"/>
           </a:xfrm>
           <a:prstGeom prst="rect">
@@ -9511,7 +9500,7 @@
               <a:buNone/>
             </a:pPr>
             <a:r>
-              <a:rPr lang="en-US" sz="1200" b="1" dirty="0">
+              <a:rPr lang="en-US" sz="1200" b="1">
                 <a:solidFill>
                   <a:srgbClr val="B85042"/>
                 </a:solidFill>
@@ -9521,7 +9510,7 @@
               </a:rPr>
               <a:t>Class Imbalance Fix</a:t>
             </a:r>
-            <a:endParaRPr lang="en-US" sz="1200" dirty="0"/>
+            <a:endParaRPr lang="en-US" sz="1200"/>
           </a:p>
         </p:txBody>
       </p:sp>
@@ -9550,7 +9539,7 @@
               <a:buNone/>
             </a:pPr>
             <a:r>
-              <a:rPr lang="en-US" sz="1000" dirty="0">
+              <a:rPr lang="en-US" sz="1000">
                 <a:solidFill>
                   <a:srgbClr val="2D3748"/>
                 </a:solidFill>
@@ -9560,7 +9549,7 @@
               </a:rPr>
               <a:t>Oversampled minority class to 8,045 records using sklearn resample(). Without this, a model can "cheat" — predicting repaid every time and be 84% accurate while catching 0% of defaults.</a:t>
             </a:r>
-            <a:endParaRPr lang="en-US" sz="1000" dirty="0"/>
+            <a:endParaRPr lang="en-US" sz="1000"/>
           </a:p>
         </p:txBody>
       </p:sp>
@@ -9614,7 +9603,7 @@
               <a:buNone/>
             </a:pPr>
             <a:r>
-              <a:rPr lang="en-US" sz="1200" b="1" dirty="0">
+              <a:rPr lang="en-US" sz="1200" b="1">
                 <a:solidFill>
                   <a:srgbClr val="1C7293"/>
                 </a:solidFill>
@@ -9624,7 +9613,7 @@
               </a:rPr>
               <a:t>StandardScaler</a:t>
             </a:r>
-            <a:endParaRPr lang="en-US" sz="1200" dirty="0"/>
+            <a:endParaRPr lang="en-US" sz="1200"/>
           </a:p>
         </p:txBody>
       </p:sp>
@@ -9653,7 +9642,7 @@
               <a:buNone/>
             </a:pPr>
             <a:r>
-              <a:rPr lang="en-US" sz="1000" dirty="0">
+              <a:rPr lang="en-US" sz="1000">
                 <a:solidFill>
                   <a:srgbClr val="2D3748"/>
                 </a:solidFill>
@@ -9663,7 +9652,7 @@
               </a:rPr>
               <a:t>Rescaled all features to mean=0, std=1. Prevents large-number columns (income) from dominating small-number columns (FICO) in the model.</a:t>
             </a:r>
-            <a:endParaRPr lang="en-US" sz="1000" dirty="0"/>
+            <a:endParaRPr lang="en-US" sz="1000"/>
           </a:p>
         </p:txBody>
       </p:sp>
@@ -9700,7 +9689,7 @@
         </p:nvSpPr>
         <p:spPr>
           <a:xfrm>
-            <a:off x="4800600" y="3054096"/>
+            <a:off x="4800600" y="2976003"/>
             <a:ext cx="3977640" cy="256032"/>
           </a:xfrm>
           <a:prstGeom prst="rect">
@@ -9717,7 +9706,7 @@
               <a:buNone/>
             </a:pPr>
             <a:r>
-              <a:rPr lang="en-US" sz="1200" b="1" dirty="0">
+              <a:rPr lang="en-US" sz="1200" b="1">
                 <a:solidFill>
                   <a:srgbClr val="065A82"/>
                 </a:solidFill>
@@ -9727,7 +9716,7 @@
               </a:rPr>
               <a:t>80/20 Train/Test Split</a:t>
             </a:r>
-            <a:endParaRPr lang="en-US" sz="1200" dirty="0"/>
+            <a:endParaRPr lang="en-US" sz="1200"/>
           </a:p>
         </p:txBody>
       </p:sp>
@@ -9756,7 +9745,7 @@
               <a:buNone/>
             </a:pPr>
             <a:r>
-              <a:rPr lang="en-US" sz="1000" dirty="0">
+              <a:rPr lang="en-US" sz="1000">
                 <a:solidFill>
                   <a:srgbClr val="2D3748"/>
                 </a:solidFill>
@@ -9766,7 +9755,7 @@
               </a:rPr>
               <a:t>Model trained on 80% of data; evaluated on 20% it has never seen. Ensures performance metrics reflect real-world accuracy, not memorization.</a:t>
             </a:r>
-            <a:endParaRPr lang="en-US" sz="1000" dirty="0"/>
+            <a:endParaRPr lang="en-US" sz="1000"/>
           </a:p>
         </p:txBody>
       </p:sp>
@@ -9820,7 +9809,7 @@
               <a:buNone/>
             </a:pPr>
             <a:r>
-              <a:rPr lang="en-US" sz="1200" b="1" dirty="0">
+              <a:rPr lang="en-US" sz="1200" b="1">
                 <a:solidFill>
                   <a:srgbClr val="2E7D32"/>
                 </a:solidFill>
@@ -9830,7 +9819,7 @@
               </a:rPr>
               <a:t>Logistic Regression</a:t>
             </a:r>
-            <a:endParaRPr lang="en-US" sz="1200" dirty="0"/>
+            <a:endParaRPr lang="en-US" sz="1200"/>
           </a:p>
         </p:txBody>
       </p:sp>
@@ -9859,7 +9848,7 @@
               <a:buNone/>
             </a:pPr>
             <a:r>
-              <a:rPr lang="en-US" sz="1000" dirty="0">
+              <a:rPr lang="en-US" sz="1000">
                 <a:solidFill>
                   <a:srgbClr val="2D3748"/>
                 </a:solidFill>
@@ -9869,7 +9858,7 @@
               </a:rPr>
               <a:t>Selected for interpretability: every coefficient directly shows a variable's influence. Appropriate for binary classification (paid vs. defaulted).</a:t>
             </a:r>
-            <a:endParaRPr lang="en-US" sz="1000" dirty="0"/>
+            <a:endParaRPr lang="en-US" sz="1000"/>
           </a:p>
         </p:txBody>
       </p:sp>
@@ -9956,7 +9945,7 @@
               <a:buNone/>
             </a:pPr>
             <a:r>
-              <a:rPr lang="en-US" sz="2400" b="1" dirty="0">
+              <a:rPr lang="en-US" sz="2400" b="1">
                 <a:solidFill>
                   <a:srgbClr val="FFFFFF"/>
                 </a:solidFill>
@@ -9966,7 +9955,7 @@
               </a:rPr>
               <a:t>Finding 1: What Actually Drives Default?</a:t>
             </a:r>
-            <a:endParaRPr lang="en-US" sz="2400" dirty="0"/>
+            <a:endParaRPr lang="en-US" sz="2400"/>
           </a:p>
         </p:txBody>
       </p:sp>
@@ -9995,7 +9984,7 @@
               <a:buNone/>
             </a:pPr>
             <a:r>
-              <a:rPr lang="en-US" sz="1200" i="1" dirty="0">
+              <a:rPr lang="en-US" sz="1200" i="1">
                 <a:solidFill>
                   <a:srgbClr val="A8D4E8"/>
                 </a:solidFill>
@@ -10005,7 +9994,7 @@
               </a:rPr>
               <a:t>Pearson correlation analysis across all 21 features</a:t>
             </a:r>
-            <a:endParaRPr lang="en-US" sz="1200" dirty="0"/>
+            <a:endParaRPr lang="en-US" sz="1200"/>
           </a:p>
         </p:txBody>
       </p:sp>
@@ -10059,7 +10048,7 @@
               <a:buNone/>
             </a:pPr>
             <a:r>
-              <a:rPr lang="en-US" sz="900" dirty="0">
+              <a:rPr lang="en-US" sz="900">
                 <a:solidFill>
                   <a:srgbClr val="64748B"/>
                 </a:solidFill>
@@ -10069,7 +10058,7 @@
               </a:rPr>
               <a:t>Kevin Sayavong  |  Data Analytics Capstone  |  LendingClub Loan Default Analysis</a:t>
             </a:r>
-            <a:endParaRPr lang="en-US" sz="900" dirty="0"/>
+            <a:endParaRPr lang="en-US" sz="900"/>
           </a:p>
         </p:txBody>
       </p:sp>
@@ -10147,7 +10136,7 @@
               <a:buNone/>
             </a:pPr>
             <a:r>
-              <a:rPr lang="en-US" sz="1100" b="1" kern="0" spc="100" dirty="0">
+              <a:rPr lang="en-US" sz="1100" b="1" kern="0" spc="100">
                 <a:solidFill>
                   <a:srgbClr val="B85042"/>
                 </a:solidFill>
@@ -10157,7 +10146,7 @@
               </a:rPr>
               <a:t>HIGHEST RISK SIGNALS</a:t>
             </a:r>
-            <a:endParaRPr lang="en-US" sz="1100" dirty="0"/>
+            <a:endParaRPr lang="en-US" sz="1100"/>
           </a:p>
         </p:txBody>
       </p:sp>
@@ -10186,7 +10175,7 @@
               <a:buNone/>
             </a:pPr>
             <a:r>
-              <a:rPr lang="en-US" sz="1100" dirty="0">
+              <a:rPr lang="en-US" sz="1100">
                 <a:solidFill>
                   <a:srgbClr val="2D3748"/>
                 </a:solidFill>
@@ -10196,7 +10185,7 @@
               </a:rPr>
               <a:t>↑ Interest Rate (+0.16)</a:t>
             </a:r>
-            <a:endParaRPr lang="en-US" sz="1100" dirty="0"/>
+            <a:endParaRPr lang="en-US" sz="1100"/>
           </a:p>
         </p:txBody>
       </p:sp>
@@ -10225,7 +10214,7 @@
               <a:buNone/>
             </a:pPr>
             <a:r>
-              <a:rPr lang="en-US" sz="1100" dirty="0">
+              <a:rPr lang="en-US" sz="1100">
                 <a:solidFill>
                   <a:srgbClr val="2D3748"/>
                 </a:solidFill>
@@ -10235,7 +10224,7 @@
               </a:rPr>
               <a:t>↑ Inquiries Last 6 Months (+0.15)</a:t>
             </a:r>
-            <a:endParaRPr lang="en-US" sz="1100" dirty="0"/>
+            <a:endParaRPr lang="en-US" sz="1100"/>
           </a:p>
         </p:txBody>
       </p:sp>
@@ -10264,7 +10253,7 @@
               <a:buNone/>
             </a:pPr>
             <a:r>
-              <a:rPr lang="en-US" sz="1100" dirty="0">
+              <a:rPr lang="en-US" sz="1100">
                 <a:solidFill>
                   <a:srgbClr val="2D3748"/>
                 </a:solidFill>
@@ -10274,7 +10263,7 @@
               </a:rPr>
               <a:t>↑ Small Business Purpose (+0.08)</a:t>
             </a:r>
-            <a:endParaRPr lang="en-US" sz="1100" dirty="0"/>
+            <a:endParaRPr lang="en-US" sz="1100"/>
           </a:p>
         </p:txBody>
       </p:sp>
@@ -10303,7 +10292,7 @@
               <a:buNone/>
             </a:pPr>
             <a:r>
-              <a:rPr lang="en-US" sz="1100" b="1" dirty="0">
+              <a:rPr lang="en-US" sz="1100" b="1">
                 <a:solidFill>
                   <a:srgbClr val="2D3748"/>
                 </a:solidFill>
@@ -10313,7 +10302,7 @@
               </a:rPr>
               <a:t>↑ Installment as Percent of Income (+0.07) *</a:t>
             </a:r>
-            <a:endParaRPr lang="en-US" sz="1100" dirty="0"/>
+            <a:endParaRPr lang="en-US" sz="1100"/>
           </a:p>
         </p:txBody>
       </p:sp>
@@ -10367,7 +10356,7 @@
               <a:buNone/>
             </a:pPr>
             <a:r>
-              <a:rPr lang="en-US" sz="1100" b="1" kern="0" spc="100" dirty="0">
+              <a:rPr lang="en-US" sz="1100" b="1" kern="0" spc="100">
                 <a:solidFill>
                   <a:srgbClr val="065A82"/>
                 </a:solidFill>
@@ -10377,7 +10366,7 @@
               </a:rPr>
               <a:t>STRONGEST PROTECTION</a:t>
             </a:r>
-            <a:endParaRPr lang="en-US" sz="1100" dirty="0"/>
+            <a:endParaRPr lang="en-US" sz="1100"/>
           </a:p>
         </p:txBody>
       </p:sp>
@@ -10406,7 +10395,7 @@
               <a:buNone/>
             </a:pPr>
             <a:r>
-              <a:rPr lang="en-US" sz="1100" dirty="0">
+              <a:rPr lang="en-US" sz="1100">
                 <a:solidFill>
                   <a:srgbClr val="2D3748"/>
                 </a:solidFill>
@@ -10416,7 +10405,7 @@
               </a:rPr>
               <a:t>↓ Meets Credit Policy (−0.16)</a:t>
             </a:r>
-            <a:endParaRPr lang="en-US" sz="1100" dirty="0"/>
+            <a:endParaRPr lang="en-US" sz="1100"/>
           </a:p>
         </p:txBody>
       </p:sp>
@@ -10445,7 +10434,7 @@
               <a:buNone/>
             </a:pPr>
             <a:r>
-              <a:rPr lang="en-US" sz="1100" dirty="0">
+              <a:rPr lang="en-US" sz="1100">
                 <a:solidFill>
                   <a:srgbClr val="2D3748"/>
                 </a:solidFill>
@@ -10455,7 +10444,7 @@
               </a:rPr>
               <a:t>↓ High FICO Score (−0.15)</a:t>
             </a:r>
-            <a:endParaRPr lang="en-US" sz="1100" dirty="0"/>
+            <a:endParaRPr lang="en-US" sz="1100"/>
           </a:p>
         </p:txBody>
       </p:sp>
@@ -10484,7 +10473,7 @@
               <a:buNone/>
             </a:pPr>
             <a:r>
-              <a:rPr lang="en-US" sz="900" i="1" dirty="0">
+              <a:rPr lang="en-US" sz="900" i="1">
                 <a:solidFill>
                   <a:srgbClr val="8B5E00"/>
                 </a:solidFill>
@@ -10494,7 +10483,7 @@
               </a:rPr>
               <a:t>* = not in original dataset</a:t>
             </a:r>
-            <a:endParaRPr lang="en-US" sz="900" dirty="0"/>
+            <a:endParaRPr lang="en-US" sz="900"/>
           </a:p>
         </p:txBody>
       </p:sp>
@@ -10581,7 +10570,7 @@
               <a:buNone/>
             </a:pPr>
             <a:r>
-              <a:rPr lang="en-US" sz="2400" b="1" dirty="0">
+              <a:rPr lang="en-US" sz="2400" b="1">
                 <a:solidFill>
                   <a:srgbClr val="FFFFFF"/>
                 </a:solidFill>
@@ -10591,7 +10580,7 @@
               </a:rPr>
               <a:t>Finding 2: FICO Score &amp; Credit Inquiries</a:t>
             </a:r>
-            <a:endParaRPr lang="en-US" sz="2400" dirty="0"/>
+            <a:endParaRPr lang="en-US" sz="2400"/>
           </a:p>
         </p:txBody>
       </p:sp>
@@ -10620,7 +10609,7 @@
               <a:buNone/>
             </a:pPr>
             <a:r>
-              <a:rPr lang="en-US" sz="1200" i="1" dirty="0">
+              <a:rPr lang="en-US" sz="1200" i="1">
                 <a:solidFill>
                   <a:srgbClr val="A8D4E8"/>
                 </a:solidFill>
@@ -10630,7 +10619,7 @@
               </a:rPr>
               <a:t>Statistical significance testing and a key risk signal</a:t>
             </a:r>
-            <a:endParaRPr lang="en-US" sz="1200" dirty="0"/>
+            <a:endParaRPr lang="en-US" sz="1200"/>
           </a:p>
         </p:txBody>
       </p:sp>
@@ -10684,7 +10673,7 @@
               <a:buNone/>
             </a:pPr>
             <a:r>
-              <a:rPr lang="en-US" sz="900" dirty="0">
+              <a:rPr lang="en-US" sz="900">
                 <a:solidFill>
                   <a:srgbClr val="64748B"/>
                 </a:solidFill>
@@ -10694,7 +10683,7 @@
               </a:rPr>
               <a:t>Kevin Sayavong  |  Data Analytics Capstone  |  LendingClub Loan Default Analysis</a:t>
             </a:r>
-            <a:endParaRPr lang="en-US" sz="900" dirty="0"/>
+            <a:endParaRPr lang="en-US" sz="900"/>
           </a:p>
         </p:txBody>
       </p:sp>
@@ -10772,7 +10761,7 @@
               <a:buNone/>
             </a:pPr>
             <a:r>
-              <a:rPr lang="en-US" sz="1000" b="1" dirty="0">
+              <a:rPr lang="en-US" sz="1000" b="1">
                 <a:solidFill>
                   <a:srgbClr val="065A82"/>
                 </a:solidFill>
@@ -10783,7 +10772,7 @@
               <a:t>Statistical Result: </a:t>
             </a:r>
             <a:r>
-              <a:rPr lang="en-US" sz="1000" dirty="0">
+              <a:rPr lang="en-US" sz="1000">
                 <a:solidFill>
                   <a:srgbClr val="2D3748"/>
                 </a:solidFill>
@@ -10793,7 +10782,7 @@
               </a:rPr>
               <a:t>The 15-point gap is statistically significant (p&lt;0.001), but the effect size is small (Cohen's d=0.43). Large distribution overlap means FICO alone cannot reliably separate defaulters from repayers — it must be combined with other variables.</a:t>
             </a:r>
-            <a:endParaRPr lang="en-US" sz="1000" dirty="0"/>
+            <a:endParaRPr lang="en-US" sz="1000"/>
           </a:p>
         </p:txBody>
       </p:sp>
@@ -10871,7 +10860,7 @@
               <a:buNone/>
             </a:pPr>
             <a:r>
-              <a:rPr lang="en-US" sz="1000" b="1" dirty="0">
+              <a:rPr lang="en-US" sz="1000" b="1">
                 <a:solidFill>
                   <a:srgbClr val="065A82"/>
                 </a:solidFill>
@@ -10882,7 +10871,7 @@
               <a:t>Key Signal: </a:t>
             </a:r>
             <a:r>
-              <a:rPr lang="en-US" sz="1000" dirty="0">
+              <a:rPr lang="en-US" sz="1000">
                 <a:solidFill>
                   <a:srgbClr val="2D3748"/>
                 </a:solidFill>
@@ -10892,7 +10881,7 @@
               </a:rPr>
               <a:t>At 4+ inquiries, defaulted borrowers are more than twice as likely to hit that threshold (23.2% vs. 10.9%). The signal strengthens at 5+ (2.5x more likely). 4+ may be a more defensible underwriting flag than 3+ — sharper signal, less noise.</a:t>
             </a:r>
-            <a:endParaRPr lang="en-US" sz="1000" dirty="0"/>
+            <a:endParaRPr lang="en-US" sz="1000"/>
           </a:p>
         </p:txBody>
       </p:sp>
@@ -10979,7 +10968,7 @@
               <a:buNone/>
             </a:pPr>
             <a:r>
-              <a:rPr lang="en-US" sz="2400" b="1" dirty="0">
+              <a:rPr lang="en-US" sz="2400" b="1">
                 <a:solidFill>
                   <a:srgbClr val="FFFFFF"/>
                 </a:solidFill>
@@ -10989,7 +10978,7 @@
               </a:rPr>
               <a:t>Finding 3: Payment Burden &amp; Loan Purpose</a:t>
             </a:r>
-            <a:endParaRPr lang="en-US" sz="2400" dirty="0"/>
+            <a:endParaRPr lang="en-US" sz="2400"/>
           </a:p>
         </p:txBody>
       </p:sp>
@@ -11018,7 +11007,7 @@
               <a:buNone/>
             </a:pPr>
             <a:r>
-              <a:rPr lang="en-US" sz="1200" i="1" dirty="0">
+              <a:rPr lang="en-US" sz="1200" i="1">
                 <a:solidFill>
                   <a:srgbClr val="A8D4E8"/>
                 </a:solidFill>
@@ -11028,7 +11017,7 @@
               </a:rPr>
               <a:t>Engineered metric analysis and default rates by purpose</a:t>
             </a:r>
-            <a:endParaRPr lang="en-US" sz="1200" dirty="0"/>
+            <a:endParaRPr lang="en-US" sz="1200"/>
           </a:p>
         </p:txBody>
       </p:sp>
@@ -11082,7 +11071,7 @@
               <a:buNone/>
             </a:pPr>
             <a:r>
-              <a:rPr lang="en-US" sz="900" dirty="0">
+              <a:rPr lang="en-US" sz="900">
                 <a:solidFill>
                   <a:srgbClr val="64748B"/>
                 </a:solidFill>
@@ -11092,7 +11081,7 @@
               </a:rPr>
               <a:t>Kevin Sayavong  |  Data Analytics Capstone  |  LendingClub Loan Default Analysis</a:t>
             </a:r>
-            <a:endParaRPr lang="en-US" sz="900" dirty="0"/>
+            <a:endParaRPr lang="en-US" sz="900"/>
           </a:p>
         </p:txBody>
       </p:sp>
@@ -11170,7 +11159,7 @@
               <a:buNone/>
             </a:pPr>
             <a:r>
-              <a:rPr lang="en-US" sz="1000" b="1" dirty="0">
+              <a:rPr lang="en-US" sz="1000" b="1">
                 <a:solidFill>
                   <a:srgbClr val="8B5E00"/>
                 </a:solidFill>
@@ -11181,7 +11170,7 @@
               <a:t>Statistical Note: </a:t>
             </a:r>
             <a:r>
-              <a:rPr lang="en-US" sz="1000" dirty="0">
+              <a:rPr lang="en-US" sz="1000">
                 <a:solidFill>
                   <a:srgbClr val="2D3748"/>
                 </a:solidFill>
@@ -11191,7 +11180,7 @@
               </a:rPr>
               <a:t>Statistically significant (p&lt;0.001), but the effect size is very small (Cohen's d=0.19). The 0.89% gap and heavy overlap mean this variable is not a reliable standalone predictor. Further data exploration is needed before establishing a policy threshold.</a:t>
             </a:r>
-            <a:endParaRPr lang="en-US" sz="1000" dirty="0"/>
+            <a:endParaRPr lang="en-US" sz="1000"/>
           </a:p>
         </p:txBody>
       </p:sp>
@@ -11244,7 +11233,7 @@
               <a:buNone/>
             </a:pPr>
             <a:r>
-              <a:rPr lang="en-US" sz="900" i="1" dirty="0">
+              <a:rPr lang="en-US" sz="900" i="1">
                 <a:solidFill>
                   <a:srgbClr val="64748B"/>
                 </a:solidFill>
@@ -11254,7 +11243,7 @@
               </a:rPr>
               <a:t>Dashed line = platform average (16.0%)</a:t>
             </a:r>
-            <a:endParaRPr lang="en-US" sz="900" dirty="0"/>
+            <a:endParaRPr lang="en-US" sz="900"/>
           </a:p>
         </p:txBody>
       </p:sp>
